--- a/reports/미세플라스틱_발표_10605_박선진.pptx
+++ b/reports/미세플라스틱_발표_10605_박선진.pptx
@@ -118,14 +118,14 @@
   <p:extLst>
     <p:ext uri="{521415D9-36F7-43E2-AB2F-B90AF26B5E84}">
       <p14:sectionLst xmlns:p14="http://schemas.microsoft.com/office/powerpoint/2010/main">
-        <p14:section name="도입" id="{9377c804-a60e-dd6b-4170-1dc219a44a89}">
+        <p14:section name="도입" id="{8734f916-56d8-fd82-5666-0c8fab82d051}">
           <p14:sldIdLst>
             <p14:sldId id="256"/>
             <p14:sldId id="257"/>
             <p14:sldId id="258"/>
           </p14:sldIdLst>
         </p14:section>
-        <p14:section name="논문 분석" id="{0b56a2d9-590c-314c-8196-efca9f00d13e}">
+        <p14:section name="논문 분석" id="{d5a3310a-9382-37c5-22f4-6857f19701e0}">
           <p14:sldIdLst>
             <p14:sldId id="259"/>
             <p14:sldId id="260"/>
@@ -135,7 +135,7 @@
             <p14:sldId id="264"/>
           </p14:sldIdLst>
         </p14:section>
-        <p14:section name="결론" id="{4158d4bb-a90c-d424-7005-160370fbb93d}">
+        <p14:section name="결론" id="{e853ff41-0369-f099-8382-16b985eb4333}">
           <p14:sldIdLst>
             <p14:sldId id="265"/>
             <p14:sldId id="266"/>
@@ -1218,7 +1218,7 @@
           <a:p>
             <a:r>
               <a:rPr lang="en-US" dirty="0"/>
-              <a:t>그렇다면 어떻게 줄일 수 있을까요? 논문이 직접 제안한 방법은 빨간 표시로 구분했습니다. 논문은 육지에서 바다로 가는 플라스틱을 줄이는 것이 가장 중요하고, 1차 미세플라스틱 사용을 줄이며, 관련 연구를 늘려야 한다고 말합니다. 여기에 제가 해양, 토양, 제도로 나누어 방법을 더 생각해 보았습니다. 해양에서는 하천에 쓰레기 차단막을 설치하고 해안 쓰레기를 부서지기 전에 수거하는 방법, 토양에서는 하수 찌꺼기 관리, 생분해성 농업용 비닐, 플라스틱 분해 세균과 효소 활용, 제도로는 측정 방법 표준화와 국제 규제가 필요하다고 생각합니다.</a:t>
+              <a:t>그렇다면 어떻게 줄일 수 있을까요? 논문이 직접 제안한 방법은 빨간 표시로 구분했습니다. 논문은 육지에서 바다로 가는 플라스틱을 줄이는 것이 가장 중요하고, 1차 미세플라스틱 사용을 줄이며, 관련 연구를 늘려야 한다고 말합니다. 여기에 제가 해양, 토양, 제도로 나누어 방법을 더 생각해 보았습니다. 해양에서는 하천에 쓰레기 차단막을 설치하는 방법과 함께, 선박 페인트 관리가 필요하다고 생각합니다. 2021년 남극 웨들해 조사에서 채집된 미세플라스틱의 47%가 배에 칠한 페인트가 부서진 것이었기 때문입니다. 오래가는 친환경 페인트를 쓰고, 배 밑을 청소할 때 떨어지는 페인트 부스러기를 회수하는 장비를 쓰면 줄일 수 있습니다. 토양에서는 하수 찌꺼기 관리, 생분해성 농업용 비닐, 플라스틱 분해 세균과 효소 활용, 제도로는 측정 방법 표준화와 국제 규제가 필요하다고 생각합니다.</a:t>
             </a:r>
             <a:endParaRPr lang="en-US" dirty="0"/>
           </a:p>
@@ -3058,7 +3058,7 @@
         </p:nvSpPr>
         <p:spPr>
           <a:xfrm>
-            <a:off x="685800" y="2057400"/>
+            <a:off x="685800" y="2011680"/>
             <a:ext cx="777240" cy="237744"/>
           </a:xfrm>
           <a:prstGeom prst="roundRect">
@@ -3080,7 +3080,7 @@
         </p:nvSpPr>
         <p:spPr>
           <a:xfrm>
-            <a:off x="685800" y="2057400"/>
+            <a:off x="685800" y="2011680"/>
             <a:ext cx="777240" cy="237744"/>
           </a:xfrm>
           <a:prstGeom prst="rect">
@@ -3116,7 +3116,7 @@
         </p:nvSpPr>
         <p:spPr>
           <a:xfrm>
-            <a:off x="685800" y="2331720"/>
+            <a:off x="685800" y="2286000"/>
             <a:ext cx="2194560" cy="411480"/>
           </a:xfrm>
           <a:prstGeom prst="rect">
@@ -3152,7 +3152,7 @@
         </p:nvSpPr>
         <p:spPr>
           <a:xfrm>
-            <a:off x="685800" y="2788920"/>
+            <a:off x="685800" y="2724912"/>
             <a:ext cx="777240" cy="237744"/>
           </a:xfrm>
           <a:prstGeom prst="roundRect">
@@ -3174,7 +3174,7 @@
         </p:nvSpPr>
         <p:spPr>
           <a:xfrm>
-            <a:off x="685800" y="2788920"/>
+            <a:off x="685800" y="2724912"/>
             <a:ext cx="777240" cy="237744"/>
           </a:xfrm>
           <a:prstGeom prst="rect">
@@ -3210,7 +3210,7 @@
         </p:nvSpPr>
         <p:spPr>
           <a:xfrm>
-            <a:off x="685800" y="3063240"/>
+            <a:off x="685800" y="2999232"/>
             <a:ext cx="2194560" cy="411480"/>
           </a:xfrm>
           <a:prstGeom prst="rect">
@@ -3246,7 +3246,7 @@
         </p:nvSpPr>
         <p:spPr>
           <a:xfrm>
-            <a:off x="685800" y="3520440"/>
+            <a:off x="685800" y="3438144"/>
             <a:ext cx="2194560" cy="457200"/>
           </a:xfrm>
           <a:prstGeom prst="rect">
@@ -3268,7 +3268,7 @@
                   <a:schemeClr val="tx1"/>
                 </a:solidFill>
               </a:rPr>
-              <a:t>하천 쓰레기 차단막, 하수 고도처리</a:t>
+              <a:t>하천 쓰레기 차단막·하수 고도처리</a:t>
             </a:r>
             <a:endParaRPr lang="en-US" sz="1200" dirty="0"/>
           </a:p>
@@ -3282,7 +3282,7 @@
         </p:nvSpPr>
         <p:spPr>
           <a:xfrm>
-            <a:off x="685800" y="4087368"/>
+            <a:off x="685800" y="3968496"/>
             <a:ext cx="2194560" cy="457200"/>
           </a:xfrm>
           <a:prstGeom prst="rect">
@@ -3304,7 +3304,7 @@
                   <a:schemeClr val="tx1"/>
                 </a:solidFill>
               </a:rPr>
-              <a:t>부서지기 전에 해안 쓰레기·폐어구 수거</a:t>
+              <a:t>선박 페인트 관리 (남극해 미세플라스틱의 47%)</a:t>
             </a:r>
             <a:endParaRPr lang="en-US" sz="1200" dirty="0"/>
           </a:p>
@@ -3420,7 +3420,7 @@
         </p:nvSpPr>
         <p:spPr>
           <a:xfrm>
-            <a:off x="3474720" y="2057400"/>
+            <a:off x="3474720" y="2011680"/>
             <a:ext cx="2194560" cy="457200"/>
           </a:xfrm>
           <a:prstGeom prst="rect">
@@ -3456,7 +3456,7 @@
         </p:nvSpPr>
         <p:spPr>
           <a:xfrm>
-            <a:off x="3474720" y="2624328"/>
+            <a:off x="3474720" y="2542032"/>
             <a:ext cx="2194560" cy="457200"/>
           </a:xfrm>
           <a:prstGeom prst="rect">
@@ -3492,7 +3492,7 @@
         </p:nvSpPr>
         <p:spPr>
           <a:xfrm>
-            <a:off x="3474720" y="3191256"/>
+            <a:off x="3474720" y="3072384"/>
             <a:ext cx="2194560" cy="457200"/>
           </a:xfrm>
           <a:prstGeom prst="rect">
@@ -3630,7 +3630,7 @@
         </p:nvSpPr>
         <p:spPr>
           <a:xfrm>
-            <a:off x="6263640" y="2057400"/>
+            <a:off x="6263640" y="2011680"/>
             <a:ext cx="777240" cy="237744"/>
           </a:xfrm>
           <a:prstGeom prst="roundRect">
@@ -3652,7 +3652,7 @@
         </p:nvSpPr>
         <p:spPr>
           <a:xfrm>
-            <a:off x="6263640" y="2057400"/>
+            <a:off x="6263640" y="2011680"/>
             <a:ext cx="777240" cy="237744"/>
           </a:xfrm>
           <a:prstGeom prst="rect">
@@ -3688,7 +3688,7 @@
         </p:nvSpPr>
         <p:spPr>
           <a:xfrm>
-            <a:off x="6263640" y="2331720"/>
+            <a:off x="6263640" y="2286000"/>
             <a:ext cx="2194560" cy="411480"/>
           </a:xfrm>
           <a:prstGeom prst="rect">
@@ -3724,7 +3724,7 @@
         </p:nvSpPr>
         <p:spPr>
           <a:xfrm>
-            <a:off x="6263640" y="2788920"/>
+            <a:off x="6263640" y="2724912"/>
             <a:ext cx="2194560" cy="457200"/>
           </a:xfrm>
           <a:prstGeom prst="rect">
@@ -3746,7 +3746,7 @@
                   <a:schemeClr val="tx1"/>
                 </a:solidFill>
               </a:rPr>
-              <a:t>측정 방법 표준화</a:t>
+              <a:t>연구마다 다른 측정 방법 표준화</a:t>
             </a:r>
             <a:endParaRPr lang="en-US" sz="1200" dirty="0"/>
           </a:p>
@@ -3760,7 +3760,7 @@
         </p:nvSpPr>
         <p:spPr>
           <a:xfrm>
-            <a:off x="6263640" y="3355848"/>
+            <a:off x="6263640" y="3255264"/>
             <a:ext cx="2194560" cy="457200"/>
           </a:xfrm>
           <a:prstGeom prst="rect">

--- a/reports/미세플라스틱_발표_10605_박선진.pptx
+++ b/reports/미세플라스틱_발표_10605_박선진.pptx
@@ -17,9 +17,10 @@
     <p:sldId id="265" r:id="rId11"/>
     <p:sldId id="266" r:id="rId12"/>
     <p:sldId id="267" r:id="rId13"/>
+    <p:sldId id="268" r:id="rId14"/>
   </p:sldIdLst>
   <p:notesMasterIdLst>
-    <p:notesMasterId r:id="rId14"/>
+    <p:notesMasterId r:id="rId15"/>
   </p:notesMasterIdLst>
   <p:sldSz cx="9144000" cy="5143500"/>
   <p:notesSz cx="5143500" cy="9144000"/>
@@ -118,14 +119,14 @@
   <p:extLst>
     <p:ext uri="{521415D9-36F7-43E2-AB2F-B90AF26B5E84}">
       <p14:sectionLst xmlns:p14="http://schemas.microsoft.com/office/powerpoint/2010/main">
-        <p14:section name="도입" id="{8734f916-56d8-fd82-5666-0c8fab82d051}">
+        <p14:section name="도입" id="{cf8a79a8-c282-326d-3e7d-152557625202}">
           <p14:sldIdLst>
             <p14:sldId id="256"/>
             <p14:sldId id="257"/>
             <p14:sldId id="258"/>
           </p14:sldIdLst>
         </p14:section>
-        <p14:section name="논문 분석" id="{d5a3310a-9382-37c5-22f4-6857f19701e0}">
+        <p14:section name="논문 분석" id="{21f9df92-1df5-c1a4-34a6-32da1481121e}">
           <p14:sldIdLst>
             <p14:sldId id="259"/>
             <p14:sldId id="260"/>
@@ -135,11 +136,12 @@
             <p14:sldId id="264"/>
           </p14:sldIdLst>
         </p14:section>
-        <p14:section name="결론" id="{e853ff41-0369-f099-8382-16b985eb4333}">
+        <p14:section name="결론" id="{a27dc663-5743-a407-2675-01928f2f45f3}">
           <p14:sldIdLst>
             <p14:sldId id="265"/>
             <p14:sldId id="266"/>
             <p14:sldId id="267"/>
+            <p14:sldId id="268"/>
           </p14:sldIdLst>
         </p14:section>
       </p14:sectionLst>
@@ -1218,7 +1220,7 @@
           <a:p>
             <a:r>
               <a:rPr lang="en-US" dirty="0"/>
-              <a:t>그렇다면 어떻게 줄일 수 있을까요? 논문이 직접 제안한 방법은 빨간 표시로 구분했습니다. 논문은 육지에서 바다로 가는 플라스틱을 줄이는 것이 가장 중요하고, 1차 미세플라스틱 사용을 줄이며, 관련 연구를 늘려야 한다고 말합니다. 여기에 제가 해양, 토양, 제도로 나누어 방법을 더 생각해 보았습니다. 해양에서는 하천에 쓰레기 차단막을 설치하는 방법과 함께, 선박 페인트 관리가 필요하다고 생각합니다. 2021년 남극 웨들해 조사에서 채집된 미세플라스틱의 47%가 배에 칠한 페인트가 부서진 것이었기 때문입니다. 오래가는 친환경 페인트를 쓰고, 배 밑을 청소할 때 떨어지는 페인트 부스러기를 회수하는 장비를 쓰면 줄일 수 있습니다. 토양에서는 하수 찌꺼기 관리, 생분해성 농업용 비닐, 플라스틱 분해 세균과 효소 활용, 제도로는 측정 방법 표준화와 국제 규제가 필요하다고 생각합니다.</a:t>
+              <a:t>그렇다면 어떻게 줄일 수 있을까요? 논문이 직접 제안한 방법은 빨간 표시로 구분했습니다. 논문은 육지에서 바다로 가는 플라스틱을 줄이는 것이 가장 중요하고, 1차 미세플라스틱 사용을 줄이며, 관련 연구를 늘려야 한다고 말합니다. 여기에 제가 해양, 토양, 제도로 나누어 방법을 더 생각해 보았습니다. 해양에서는 하천에 쓰레기 차단막을 설치하고 하수를 더 깨끗하게 처리하는 방법, 그리고 배가 다니면서 미세플라스틱을 걸러 내는 장치가 있는데 이것은 다음 장에서 자세히 설명하겠습니다. 토양에서는 하수 찌꺼기 관리, 생분해성 농업용 비닐, 플라스틱 분해 세균과 효소 활용, 제도로는 측정 방법 표준화와 국제 규제가 필요하다고 생각합니다.</a:t>
             </a:r>
             <a:endParaRPr lang="en-US" dirty="0"/>
           </a:p>
@@ -1306,7 +1308,7 @@
           <a:p>
             <a:r>
               <a:rPr lang="en-US" dirty="0"/>
-              <a:t>후속 탐구로는 공개 데이터를 직접 분석해 보고 싶습니다. 미국 해양대기청 NOAA는 1972년부터 지금까지 전 세계 바다의 미세플라스틱 농도 자료를 누구나 내려받을 수 있게 공개하고 있습니다. 이 자료를 파이썬으로 분석하되, 앞에서 본 것처럼 조사 방법이 다르면 비교가 어렵기 때문에 같은 방법끼리 묶겠습니다. 그다음 우리나라 주변 바다와 다른 바다를 비교하고, 연도별 추세를 그래프로 그려서 '미세플라스틱은 앞으로도 계속 늘어난다'는 논문의 주장을 데이터로 확인해 보겠습니다.</a:t>
+              <a:t>논문 밖에서 찾아본 해양 해결 방법 중 가장 인상 깊었던 것은 배가 다니면서 미세플라스틱을 걸러 내는 장치입니다. 일본 해운회사 상선미쓰이와 미우라공업이 함께 만든 장치인데, 배는 엔진을 식히려고 항해하는 동안 계속 바닷물을 끌어들입니다. 이 바닷물 일부를 사이클론이라는 원심분리기로 돌려 미세플라스틱을 따로 모으고 거름망으로 회수합니다. 2022년 6월부터 자동차 운반선에 실려 항해하면서 계속 회수하고 있고, 처음 만든 장치보다 1년에 처리하는 바닷물이 약 70배 많습니다. 배 한 척이 모으는 양은 아직 적다는 한계가 있지만, 회수한 미세플라스틱의 성분, 양, 위치, 시기를 일본 환경성 데이터베이스에 제공해서 바다 오염 지도를 만드는 데 쓰입니다. 전 세계 바다를 다니는 배들이 미세플라스틱을 줄이면서 동시에 측정 데이터도 모을 수 있다는 점이 데이터에 관심 있는 저에게 특히 흥미로웠습니다.</a:t>
             </a:r>
             <a:endParaRPr lang="en-US" dirty="0"/>
           </a:p>
@@ -1394,7 +1396,7 @@
           <a:p>
             <a:r>
               <a:rPr lang="en-US" dirty="0"/>
-              <a:t>정리하겠습니다. 바다에 버린 플라스틱은 잘게 부서져 해양 생물 몸에 쌓이고, 먹이사슬을 따라 최상위 포식자까지 전달되며, 결국 해산물을 통해 우리 식탁으로 돌아옵니다. 입자가 작을수록 더 위험하고, 한번 퍼지면 회수할 수 없기 때문에 육지에서 바다로 가는 플라스틱을 줄이는 것이 가장 중요합니다. 이번 탐구를 통해 논문도 꼼꼼히 따져 읽어야 한다는 것과, 같은 기준으로 정확한 데이터를 모으는 것이 연구의 출발점이라는 것을 배웠습니다. 저부터 텀블러를 쓰고 일회용 플라스틱을 줄이겠습니다. 들어 주셔서 감사합니다.</a:t>
+              <a:t>후속 탐구로는 공개 데이터를 직접 분석해 보고 싶습니다. 미국 해양대기청 NOAA는 1972년부터 지금까지 전 세계 바다의 미세플라스틱 농도 자료를 누구나 내려받을 수 있게 공개하고 있습니다. 이 자료를 파이썬으로 분석하되, 앞에서 본 것처럼 조사 방법이 다르면 비교가 어렵기 때문에 같은 방법끼리 묶겠습니다. 그다음 우리나라 주변 바다와 다른 바다를 비교하고, 연도별 추세를 그래프로 그려서 '미세플라스틱은 앞으로도 계속 늘어난다'는 논문의 주장을 데이터로 확인해 보겠습니다.</a:t>
             </a:r>
             <a:endParaRPr lang="en-US" dirty="0"/>
           </a:p>
@@ -1418,6 +1420,94 @@
             <a:fld id="{F7021451-1387-4CA6-816F-3879F97B5CBC}" type="slidenum">
               <a:rPr lang="en-US"/>
               <a:t>12</a:t>
+            </a:fld>
+            <a:endParaRPr lang="en-US"/>
+          </a:p>
+        </p:txBody>
+      </p:sp>
+    </p:spTree>
+    <p:extLst>
+      <p:ext uri="{BB962C8B-B14F-4D97-AF65-F5344CB8AC3E}">
+        <p14:creationId xmlns:p14="http://schemas.microsoft.com/office/powerpoint/2010/main" val="1024086991"/>
+      </p:ext>
+    </p:extLst>
+  </p:cSld>
+  <p:clrMapOvr>
+    <a:masterClrMapping/>
+  </p:clrMapOvr>
+</p:notes>
+</file>
+
+<file path=ppt/notesSlides/notesSlide13.xml><?xml version="1.0" encoding="utf-8"?>
+<p:notes xmlns:a="http://schemas.openxmlformats.org/drawingml/2006/main" xmlns:r="http://schemas.openxmlformats.org/officeDocument/2006/relationships" xmlns:p="http://schemas.openxmlformats.org/presentationml/2006/main">
+  <p:cSld>
+    <p:spTree>
+      <p:nvGrpSpPr>
+        <p:cNvPr id="1" name=""/>
+        <p:cNvGrpSpPr/>
+        <p:nvPr/>
+      </p:nvGrpSpPr>
+      <p:grpSpPr>
+        <a:xfrm>
+          <a:off x="0" y="0"/>
+          <a:ext cx="0" cy="0"/>
+          <a:chOff x="0" y="0"/>
+          <a:chExt cx="0" cy="0"/>
+        </a:xfrm>
+      </p:grpSpPr>
+      <p:sp>
+        <p:nvSpPr>
+          <p:cNvPr id="2" name="Slide Image Placeholder 1"/>
+          <p:cNvSpPr>
+            <a:spLocks noGrp="1" noRot="1" noChangeAspect="1"/>
+          </p:cNvSpPr>
+          <p:nvPr>
+            <p:ph type="sldImg"/>
+          </p:nvPr>
+        </p:nvSpPr>
+        <p:spPr/>
+      </p:sp>
+      <p:sp>
+        <p:nvSpPr>
+          <p:cNvPr id="3" name="Notes Placeholder 2"/>
+          <p:cNvSpPr>
+            <a:spLocks noGrp="1"/>
+          </p:cNvSpPr>
+          <p:nvPr>
+            <p:ph type="body" idx="1"/>
+          </p:nvPr>
+        </p:nvSpPr>
+        <p:spPr/>
+        <p:txBody>
+          <a:bodyPr/>
+          <a:lstStyle/>
+          <a:p>
+            <a:r>
+              <a:rPr lang="en-US" dirty="0"/>
+              <a:t>정리하겠습니다. 바다에 버린 플라스틱은 잘게 부서져 해양 생물 몸에 쌓이고, 먹이사슬을 따라 최상위 포식자까지 전달되며, 결국 해산물을 통해 우리 식탁으로 돌아옵니다. 입자가 작을수록 더 위험하고, 한번 퍼지면 회수할 수 없기 때문에 육지에서 바다로 가는 플라스틱을 줄이는 것이 가장 중요합니다. 이번 탐구를 통해 논문도 꼼꼼히 따져 읽어야 한다는 것과, 같은 기준으로 정확한 데이터를 모으는 것이 연구의 출발점이라는 것을 배웠습니다. 저부터 텀블러를 쓰고 일회용 플라스틱을 줄이겠습니다. 들어 주셔서 감사합니다.</a:t>
+            </a:r>
+            <a:endParaRPr lang="en-US" dirty="0"/>
+          </a:p>
+        </p:txBody>
+      </p:sp>
+      <p:sp>
+        <p:nvSpPr>
+          <p:cNvPr id="4" name="Slide Number Placeholder 3"/>
+          <p:cNvSpPr>
+            <a:spLocks noGrp="1"/>
+          </p:cNvSpPr>
+          <p:nvPr>
+            <p:ph type="sldNum" sz="quarter" idx="10"/>
+          </p:nvPr>
+        </p:nvSpPr>
+        <p:spPr/>
+        <p:txBody>
+          <a:bodyPr/>
+          <a:lstStyle/>
+          <a:p>
+            <a:fld id="{F7021451-1387-4CA6-816F-3879F97B5CBC}" type="slidenum">
+              <a:rPr lang="en-US"/>
+              <a:t>13</a:t>
             </a:fld>
             <a:endParaRPr lang="en-US"/>
           </a:p>
@@ -3304,7 +3394,7 @@
                   <a:schemeClr val="tx1"/>
                 </a:solidFill>
               </a:rPr>
-              <a:t>선박 페인트 관리 (남극해 미세플라스틱의 47%)</a:t>
+              <a:t>항해하며 미세플라스틱을 걸러 내는 선박 장치</a:t>
             </a:r>
             <a:endParaRPr lang="en-US" sz="1200" dirty="0"/>
           </a:p>
@@ -3890,7 +3980,7 @@
                   <a:schemeClr val="tx2"/>
                 </a:solidFill>
               </a:rPr>
-              <a:t>후속 탐구: 공개 데이터로 직접 확인하기</a:t>
+              <a:t>배가 다니면서 미세플라스틱을 걸러 낸다</a:t>
             </a:r>
             <a:endParaRPr lang="en-US" sz="2600" dirty="0"/>
           </a:p>
@@ -3898,14 +3988,72 @@
       </p:sp>
       <p:sp>
         <p:nvSpPr>
-          <p:cNvPr id="3" name="데이터 circle"/>
+          <p:cNvPr id="3" name="Text 1"/>
+          <p:cNvSpPr txBox="1"/>
+          <p:nvPr/>
+        </p:nvSpPr>
+        <p:spPr>
+          <a:xfrm>
+            <a:off x="457200" y="1051560"/>
+            <a:ext cx="8229600" cy="320040"/>
+          </a:xfrm>
+          <a:prstGeom prst="rect">
+            <a:avLst/>
+          </a:prstGeom>
+          <a:noFill/>
+          <a:ln/>
+        </p:spPr>
+        <p:txBody>
+          <a:bodyPr wrap="square" lIns="0" tIns="0" rIns="0" bIns="0" rtlCol="0" anchor="t"/>
+          <a:lstStyle/>
+          <a:p>
+            <a:pPr indent="0" marL="0">
+              <a:buNone/>
+            </a:pPr>
+            <a:r>
+              <a:rPr lang="en-US" sz="1400" b="1" dirty="0">
+                <a:solidFill>
+                  <a:schemeClr val="accent1"/>
+                </a:solidFill>
+              </a:rPr>
+              <a:t>일본 상선미쓰이(MOL)·미우라공업의 미세플라스틱 회수 장치</a:t>
+            </a:r>
+            <a:endParaRPr lang="en-US" sz="1400" dirty="0"/>
+          </a:p>
+        </p:txBody>
+      </p:sp>
+      <p:sp>
+        <p:nvSpPr>
+          <p:cNvPr id="4" name="장치 단계 1"/>
           <p:cNvSpPr/>
           <p:nvPr/>
         </p:nvSpPr>
         <p:spPr>
           <a:xfrm>
-            <a:off x="457200" y="1188720"/>
-            <a:ext cx="640080" cy="640080"/>
+            <a:off x="457200" y="1508760"/>
+            <a:ext cx="1920240" cy="1965960"/>
+          </a:xfrm>
+          <a:prstGeom prst="roundRect">
+            <a:avLst>
+              <a:gd name="adj" fmla="val 5714"/>
+            </a:avLst>
+          </a:prstGeom>
+          <a:solidFill>
+            <a:schemeClr val="bg2"/>
+          </a:solidFill>
+          <a:ln/>
+        </p:spPr>
+      </p:sp>
+      <p:sp>
+        <p:nvSpPr>
+          <p:cNvPr id="5" name="바닷물 끌어오기 circle"/>
+          <p:cNvSpPr/>
+          <p:nvPr/>
+        </p:nvSpPr>
+        <p:spPr>
+          <a:xfrm>
+            <a:off x="640080" y="1645920"/>
+            <a:ext cx="548640" cy="548640"/>
           </a:xfrm>
           <a:prstGeom prst="ellipse">
             <a:avLst/>
@@ -3918,7 +4066,7 @@
       </p:sp>
       <p:pic>
         <p:nvPicPr>
-          <p:cNvPr id="4" name="데이터 icon" descr="데이터">    </p:cNvPr>
+          <p:cNvPr id="6" name="바닷물 끌어오기 icon" descr="바닷물 끌어오기">    </p:cNvPr>
           <p:cNvPicPr>
             <a:picLocks noChangeAspect="1"/>
           </p:cNvPicPr>
@@ -3932,8 +4080,8 @@
         </p:blipFill>
         <p:spPr>
           <a:xfrm>
-            <a:off x="617220" y="1348740"/>
-            <a:ext cx="320040" cy="320040"/>
+            <a:off x="777240" y="1783080"/>
+            <a:ext cx="274320" cy="274320"/>
           </a:xfrm>
           <a:prstGeom prst="rect">
             <a:avLst/>
@@ -3942,86 +4090,110 @@
       </p:pic>
       <p:sp>
         <p:nvSpPr>
-          <p:cNvPr id="5" name="Text 2"/>
-          <p:cNvSpPr txBox="1"/>
-          <p:nvPr/>
-        </p:nvSpPr>
-        <p:spPr>
-          <a:xfrm>
-            <a:off x="1234440" y="1188720"/>
-            <a:ext cx="7406640" cy="365760"/>
-          </a:xfrm>
-          <a:prstGeom prst="rect">
-            <a:avLst/>
-          </a:prstGeom>
-          <a:noFill/>
-          <a:ln/>
-        </p:spPr>
-        <p:txBody>
-          <a:bodyPr wrap="square" lIns="0" tIns="0" rIns="0" bIns="0" rtlCol="0" anchor="ctr"/>
-          <a:lstStyle/>
-          <a:p>
-            <a:pPr indent="0" marL="0">
-              <a:buNone/>
-            </a:pPr>
-            <a:r>
-              <a:rPr lang="en-US" sz="1500" b="1" dirty="0">
+          <p:cNvPr id="7" name="Text 4"/>
+          <p:cNvSpPr txBox="1"/>
+          <p:nvPr/>
+        </p:nvSpPr>
+        <p:spPr>
+          <a:xfrm>
+            <a:off x="640080" y="2286000"/>
+            <a:ext cx="1600200" cy="365760"/>
+          </a:xfrm>
+          <a:prstGeom prst="rect">
+            <a:avLst/>
+          </a:prstGeom>
+          <a:noFill/>
+          <a:ln/>
+        </p:spPr>
+        <p:txBody>
+          <a:bodyPr wrap="square" lIns="0" tIns="0" rIns="0" bIns="0" rtlCol="0" anchor="t"/>
+          <a:lstStyle/>
+          <a:p>
+            <a:pPr indent="0" marL="0">
+              <a:buNone/>
+            </a:pPr>
+            <a:r>
+              <a:rPr lang="en-US" sz="1400" b="1" dirty="0">
                 <a:solidFill>
                   <a:schemeClr val="tx2"/>
                 </a:solidFill>
               </a:rPr>
-              <a:t>NOAA 전 세계 해양 미세플라스틱 데이터베이스 (1972년~현재)</a:t>
-            </a:r>
-            <a:endParaRPr lang="en-US" sz="1500" dirty="0"/>
-          </a:p>
-        </p:txBody>
-      </p:sp>
-      <p:sp>
-        <p:nvSpPr>
-          <p:cNvPr id="6" name="Text 3"/>
-          <p:cNvSpPr txBox="1"/>
-          <p:nvPr/>
-        </p:nvSpPr>
-        <p:spPr>
-          <a:xfrm>
-            <a:off x="1234440" y="1554480"/>
-            <a:ext cx="7406640" cy="320040"/>
-          </a:xfrm>
-          <a:prstGeom prst="rect">
-            <a:avLst/>
-          </a:prstGeom>
-          <a:noFill/>
-          <a:ln/>
-        </p:spPr>
-        <p:txBody>
-          <a:bodyPr wrap="square" lIns="0" tIns="0" rIns="0" bIns="0" rtlCol="0" anchor="ctr"/>
-          <a:lstStyle/>
-          <a:p>
-            <a:pPr indent="0" marL="0">
-              <a:buNone/>
-            </a:pPr>
-            <a:r>
-              <a:rPr lang="en-US" sz="1300" dirty="0">
-                <a:solidFill>
-                  <a:schemeClr val="accent6"/>
-                </a:solidFill>
-              </a:rPr>
-              <a:t>+ 공공데이터포털 해양환경공단 '해양쓰레기 모니터링' 자료</a:t>
-            </a:r>
-            <a:endParaRPr lang="en-US" sz="1300" dirty="0"/>
-          </a:p>
-        </p:txBody>
-      </p:sp>
-      <p:sp>
-        <p:nvSpPr>
-          <p:cNvPr id="7" name="단계 카드 1"/>
+              <a:t>바닷물 끌어오기</a:t>
+            </a:r>
+            <a:endParaRPr lang="en-US" sz="1400" dirty="0"/>
+          </a:p>
+        </p:txBody>
+      </p:sp>
+      <p:sp>
+        <p:nvSpPr>
+          <p:cNvPr id="8" name="Text 5"/>
+          <p:cNvSpPr txBox="1"/>
+          <p:nvPr/>
+        </p:nvSpPr>
+        <p:spPr>
+          <a:xfrm>
+            <a:off x="640080" y="2651760"/>
+            <a:ext cx="1600200" cy="731520"/>
+          </a:xfrm>
+          <a:prstGeom prst="rect">
+            <a:avLst/>
+          </a:prstGeom>
+          <a:noFill/>
+          <a:ln/>
+        </p:spPr>
+        <p:txBody>
+          <a:bodyPr wrap="square" lIns="0" tIns="0" rIns="0" bIns="0" rtlCol="0" anchor="t"/>
+          <a:lstStyle/>
+          <a:p>
+            <a:pPr indent="0" marL="0">
+              <a:buNone/>
+            </a:pPr>
+            <a:r>
+              <a:rPr lang="en-US" sz="1100" dirty="0">
+                <a:solidFill>
+                  <a:schemeClr val="tx1"/>
+                </a:solidFill>
+              </a:rPr>
+              <a:t>엔진을 식히려고 항해 중 계속 끌어들이는 바닷물 일부를 나눔</a:t>
+            </a:r>
+            <a:endParaRPr lang="en-US" sz="1100" dirty="0"/>
+          </a:p>
+        </p:txBody>
+      </p:sp>
+      <p:pic>
+        <p:nvPicPr>
+          <p:cNvPr id="9" name="장치 화살표 1" descr="다음 단계">    </p:cNvPr>
+          <p:cNvPicPr>
+            <a:picLocks noChangeAspect="1"/>
+          </p:cNvPicPr>
+          <p:nvPr/>
+        </p:nvPicPr>
+        <p:blipFill>
+          <a:blip r:embed="rId2"/>
+          <a:stretch>
+            <a:fillRect/>
+          </a:stretch>
+        </p:blipFill>
+        <p:spPr>
+          <a:xfrm>
+            <a:off x="2395728" y="2377440"/>
+            <a:ext cx="146304" cy="146304"/>
+          </a:xfrm>
+          <a:prstGeom prst="rect">
+            <a:avLst/>
+          </a:prstGeom>
+        </p:spPr>
+      </p:pic>
+      <p:sp>
+        <p:nvSpPr>
+          <p:cNvPr id="10" name="장치 단계 2"/>
           <p:cNvSpPr/>
           <p:nvPr/>
         </p:nvSpPr>
         <p:spPr>
           <a:xfrm>
-            <a:off x="457200" y="2194560"/>
-            <a:ext cx="1920240" cy="2103120"/>
+            <a:off x="2560320" y="1508760"/>
+            <a:ext cx="1920240" cy="1965960"/>
           </a:xfrm>
           <a:prstGeom prst="roundRect">
             <a:avLst>
@@ -4036,15 +4208,59 @@
       </p:sp>
       <p:sp>
         <p:nvSpPr>
-          <p:cNvPr id="8" name="Text 5"/>
-          <p:cNvSpPr txBox="1"/>
-          <p:nvPr/>
-        </p:nvSpPr>
-        <p:spPr>
-          <a:xfrm>
-            <a:off x="640080" y="2331720"/>
+          <p:cNvPr id="11" name="원심분리 circle"/>
+          <p:cNvSpPr/>
+          <p:nvPr/>
+        </p:nvSpPr>
+        <p:spPr>
+          <a:xfrm>
+            <a:off x="2743200" y="1645920"/>
             <a:ext cx="548640" cy="548640"/>
           </a:xfrm>
+          <a:prstGeom prst="ellipse">
+            <a:avLst/>
+          </a:prstGeom>
+          <a:solidFill>
+            <a:schemeClr val="accent1"/>
+          </a:solidFill>
+          <a:ln/>
+        </p:spPr>
+      </p:sp>
+      <p:pic>
+        <p:nvPicPr>
+          <p:cNvPr id="12" name="원심분리 icon" descr="원심분리">    </p:cNvPr>
+          <p:cNvPicPr>
+            <a:picLocks noChangeAspect="1"/>
+          </p:cNvPicPr>
+          <p:nvPr/>
+        </p:nvPicPr>
+        <p:blipFill>
+          <a:blip r:embed="rId3"/>
+          <a:stretch>
+            <a:fillRect/>
+          </a:stretch>
+        </p:blipFill>
+        <p:spPr>
+          <a:xfrm>
+            <a:off x="2880360" y="1783080"/>
+            <a:ext cx="274320" cy="274320"/>
+          </a:xfrm>
+          <a:prstGeom prst="rect">
+            <a:avLst/>
+          </a:prstGeom>
+        </p:spPr>
+      </p:pic>
+      <p:sp>
+        <p:nvSpPr>
+          <p:cNvPr id="13" name="Text 8"/>
+          <p:cNvSpPr txBox="1"/>
+          <p:nvPr/>
+        </p:nvSpPr>
+        <p:spPr>
+          <a:xfrm>
+            <a:off x="2743200" y="2286000"/>
+            <a:ext cx="1600200" cy="365760"/>
+          </a:xfrm>
           <a:prstGeom prst="rect">
             <a:avLst/>
           </a:prstGeom>
@@ -4059,27 +4275,27 @@
               <a:buNone/>
             </a:pPr>
             <a:r>
-              <a:rPr lang="en-US" sz="2800" b="1" dirty="0">
-                <a:solidFill>
-                  <a:schemeClr val="accent1"/>
-                </a:solidFill>
-              </a:rPr>
-              <a:t>1</a:t>
-            </a:r>
-            <a:endParaRPr lang="en-US" sz="2800" dirty="0"/>
-          </a:p>
-        </p:txBody>
-      </p:sp>
-      <p:sp>
-        <p:nvSpPr>
-          <p:cNvPr id="9" name="Text 6"/>
-          <p:cNvSpPr txBox="1"/>
-          <p:nvPr/>
-        </p:nvSpPr>
-        <p:spPr>
-          <a:xfrm>
-            <a:off x="640080" y="2926080"/>
-            <a:ext cx="1600200" cy="411480"/>
+              <a:rPr lang="en-US" sz="1400" b="1" dirty="0">
+                <a:solidFill>
+                  <a:schemeClr val="tx2"/>
+                </a:solidFill>
+              </a:rPr>
+              <a:t>원심분리</a:t>
+            </a:r>
+            <a:endParaRPr lang="en-US" sz="1400" dirty="0"/>
+          </a:p>
+        </p:txBody>
+      </p:sp>
+      <p:sp>
+        <p:nvSpPr>
+          <p:cNvPr id="14" name="Text 9"/>
+          <p:cNvSpPr txBox="1"/>
+          <p:nvPr/>
+        </p:nvSpPr>
+        <p:spPr>
+          <a:xfrm>
+            <a:off x="2743200" y="2651760"/>
+            <a:ext cx="1600200" cy="731520"/>
           </a:xfrm>
           <a:prstGeom prst="rect">
             <a:avLst/>
@@ -4095,63 +4311,51 @@
               <a:buNone/>
             </a:pPr>
             <a:r>
-              <a:rPr lang="en-US" sz="1500" b="1" dirty="0">
-                <a:solidFill>
-                  <a:schemeClr val="tx2"/>
-                </a:solidFill>
-              </a:rPr>
-              <a:t>내려받기</a:t>
-            </a:r>
-            <a:endParaRPr lang="en-US" sz="1500" dirty="0"/>
-          </a:p>
-        </p:txBody>
-      </p:sp>
-      <p:sp>
-        <p:nvSpPr>
-          <p:cNvPr id="10" name="Text 7"/>
-          <p:cNvSpPr txBox="1"/>
-          <p:nvPr/>
-        </p:nvSpPr>
-        <p:spPr>
-          <a:xfrm>
-            <a:off x="640080" y="3383280"/>
-            <a:ext cx="1600200" cy="777240"/>
-          </a:xfrm>
-          <a:prstGeom prst="rect">
-            <a:avLst/>
-          </a:prstGeom>
-          <a:noFill/>
-          <a:ln/>
-        </p:spPr>
-        <p:txBody>
-          <a:bodyPr wrap="square" lIns="0" tIns="0" rIns="0" bIns="0" rtlCol="0" anchor="t"/>
-          <a:lstStyle/>
-          <a:p>
-            <a:pPr indent="0" marL="0">
-              <a:buNone/>
-            </a:pPr>
-            <a:r>
-              <a:rPr lang="en-US" sz="1200" dirty="0">
+              <a:rPr lang="en-US" sz="1100" dirty="0">
                 <a:solidFill>
                   <a:schemeClr val="tx1"/>
                 </a:solidFill>
               </a:rPr>
-              <a:t>전 세계 바닷물·해변·퇴적물 농도 자료</a:t>
-            </a:r>
-            <a:endParaRPr lang="en-US" sz="1200" dirty="0"/>
-          </a:p>
-        </p:txBody>
-      </p:sp>
-      <p:sp>
-        <p:nvSpPr>
-          <p:cNvPr id="11" name="단계 카드 2"/>
+              <a:t>사이클론으로 빙빙 돌려 미세플라스틱을 따로 모음</a:t>
+            </a:r>
+            <a:endParaRPr lang="en-US" sz="1100" dirty="0"/>
+          </a:p>
+        </p:txBody>
+      </p:sp>
+      <p:pic>
+        <p:nvPicPr>
+          <p:cNvPr id="15" name="장치 화살표 2" descr="다음 단계">    </p:cNvPr>
+          <p:cNvPicPr>
+            <a:picLocks noChangeAspect="1"/>
+          </p:cNvPicPr>
+          <p:nvPr/>
+        </p:nvPicPr>
+        <p:blipFill>
+          <a:blip r:embed="rId4"/>
+          <a:stretch>
+            <a:fillRect/>
+          </a:stretch>
+        </p:blipFill>
+        <p:spPr>
+          <a:xfrm>
+            <a:off x="4498848" y="2377440"/>
+            <a:ext cx="146304" cy="146304"/>
+          </a:xfrm>
+          <a:prstGeom prst="rect">
+            <a:avLst/>
+          </a:prstGeom>
+        </p:spPr>
+      </p:pic>
+      <p:sp>
+        <p:nvSpPr>
+          <p:cNvPr id="16" name="장치 단계 3"/>
           <p:cNvSpPr/>
           <p:nvPr/>
         </p:nvSpPr>
         <p:spPr>
           <a:xfrm>
-            <a:off x="2560320" y="2194560"/>
-            <a:ext cx="1920240" cy="2103120"/>
+            <a:off x="4663440" y="1508760"/>
+            <a:ext cx="1920240" cy="1965960"/>
           </a:xfrm>
           <a:prstGeom prst="roundRect">
             <a:avLst>
@@ -4166,15 +4370,59 @@
       </p:sp>
       <p:sp>
         <p:nvSpPr>
-          <p:cNvPr id="12" name="Text 9"/>
-          <p:cNvSpPr txBox="1"/>
-          <p:nvPr/>
-        </p:nvSpPr>
-        <p:spPr>
-          <a:xfrm>
-            <a:off x="2743200" y="2331720"/>
+          <p:cNvPr id="17" name="걸러서 회수 circle"/>
+          <p:cNvSpPr/>
+          <p:nvPr/>
+        </p:nvSpPr>
+        <p:spPr>
+          <a:xfrm>
+            <a:off x="4846320" y="1645920"/>
             <a:ext cx="548640" cy="548640"/>
           </a:xfrm>
+          <a:prstGeom prst="ellipse">
+            <a:avLst/>
+          </a:prstGeom>
+          <a:solidFill>
+            <a:schemeClr val="accent1"/>
+          </a:solidFill>
+          <a:ln/>
+        </p:spPr>
+      </p:sp>
+      <p:pic>
+        <p:nvPicPr>
+          <p:cNvPr id="18" name="걸러서 회수 icon" descr="걸러서 회수">    </p:cNvPr>
+          <p:cNvPicPr>
+            <a:picLocks noChangeAspect="1"/>
+          </p:cNvPicPr>
+          <p:nvPr/>
+        </p:nvPicPr>
+        <p:blipFill>
+          <a:blip r:embed="rId5"/>
+          <a:stretch>
+            <a:fillRect/>
+          </a:stretch>
+        </p:blipFill>
+        <p:spPr>
+          <a:xfrm>
+            <a:off x="4983480" y="1783080"/>
+            <a:ext cx="274320" cy="274320"/>
+          </a:xfrm>
+          <a:prstGeom prst="rect">
+            <a:avLst/>
+          </a:prstGeom>
+        </p:spPr>
+      </p:pic>
+      <p:sp>
+        <p:nvSpPr>
+          <p:cNvPr id="19" name="Text 12"/>
+          <p:cNvSpPr txBox="1"/>
+          <p:nvPr/>
+        </p:nvSpPr>
+        <p:spPr>
+          <a:xfrm>
+            <a:off x="4846320" y="2286000"/>
+            <a:ext cx="1600200" cy="365760"/>
+          </a:xfrm>
           <a:prstGeom prst="rect">
             <a:avLst/>
           </a:prstGeom>
@@ -4189,27 +4437,27 @@
               <a:buNone/>
             </a:pPr>
             <a:r>
-              <a:rPr lang="en-US" sz="2800" b="1" dirty="0">
-                <a:solidFill>
-                  <a:schemeClr val="accent1"/>
-                </a:solidFill>
-              </a:rPr>
-              <a:t>2</a:t>
-            </a:r>
-            <a:endParaRPr lang="en-US" sz="2800" dirty="0"/>
-          </a:p>
-        </p:txBody>
-      </p:sp>
-      <p:sp>
-        <p:nvSpPr>
-          <p:cNvPr id="13" name="Text 10"/>
-          <p:cNvSpPr txBox="1"/>
-          <p:nvPr/>
-        </p:nvSpPr>
-        <p:spPr>
-          <a:xfrm>
-            <a:off x="2743200" y="2926080"/>
-            <a:ext cx="1600200" cy="411480"/>
+              <a:rPr lang="en-US" sz="1400" b="1" dirty="0">
+                <a:solidFill>
+                  <a:schemeClr val="tx2"/>
+                </a:solidFill>
+              </a:rPr>
+              <a:t>걸러서 회수</a:t>
+            </a:r>
+            <a:endParaRPr lang="en-US" sz="1400" dirty="0"/>
+          </a:p>
+        </p:txBody>
+      </p:sp>
+      <p:sp>
+        <p:nvSpPr>
+          <p:cNvPr id="20" name="Text 13"/>
+          <p:cNvSpPr txBox="1"/>
+          <p:nvPr/>
+        </p:nvSpPr>
+        <p:spPr>
+          <a:xfrm>
+            <a:off x="4846320" y="2651760"/>
+            <a:ext cx="1600200" cy="731520"/>
           </a:xfrm>
           <a:prstGeom prst="rect">
             <a:avLst/>
@@ -4225,63 +4473,51 @@
               <a:buNone/>
             </a:pPr>
             <a:r>
-              <a:rPr lang="en-US" sz="1500" b="1" dirty="0">
-                <a:solidFill>
-                  <a:schemeClr val="tx2"/>
-                </a:solidFill>
-              </a:rPr>
-              <a:t>방법별 정리</a:t>
-            </a:r>
-            <a:endParaRPr lang="en-US" sz="1500" dirty="0"/>
-          </a:p>
-        </p:txBody>
-      </p:sp>
-      <p:sp>
-        <p:nvSpPr>
-          <p:cNvPr id="14" name="Text 11"/>
-          <p:cNvSpPr txBox="1"/>
-          <p:nvPr/>
-        </p:nvSpPr>
-        <p:spPr>
-          <a:xfrm>
-            <a:off x="2743200" y="3383280"/>
-            <a:ext cx="1600200" cy="777240"/>
-          </a:xfrm>
-          <a:prstGeom prst="rect">
-            <a:avLst/>
-          </a:prstGeom>
-          <a:noFill/>
-          <a:ln/>
-        </p:spPr>
-        <p:txBody>
-          <a:bodyPr wrap="square" lIns="0" tIns="0" rIns="0" bIns="0" rtlCol="0" anchor="t"/>
-          <a:lstStyle/>
-          <a:p>
-            <a:pPr indent="0" marL="0">
-              <a:buNone/>
-            </a:pPr>
-            <a:r>
-              <a:rPr lang="en-US" sz="1200" dirty="0">
+              <a:rPr lang="en-US" sz="1100" dirty="0">
                 <a:solidFill>
                   <a:schemeClr val="tx1"/>
                 </a:solidFill>
               </a:rPr>
-              <a:t>조사 방법이 같은 자료끼리 묶어 비교</a:t>
-            </a:r>
-            <a:endParaRPr lang="en-US" sz="1200" dirty="0"/>
-          </a:p>
-        </p:txBody>
-      </p:sp>
-      <p:sp>
-        <p:nvSpPr>
-          <p:cNvPr id="15" name="단계 카드 3"/>
+              <a:t>모인 미세플라스틱을 거름망으로 회수</a:t>
+            </a:r>
+            <a:endParaRPr lang="en-US" sz="1100" dirty="0"/>
+          </a:p>
+        </p:txBody>
+      </p:sp>
+      <p:pic>
+        <p:nvPicPr>
+          <p:cNvPr id="21" name="장치 화살표 3" descr="다음 단계">    </p:cNvPr>
+          <p:cNvPicPr>
+            <a:picLocks noChangeAspect="1"/>
+          </p:cNvPicPr>
+          <p:nvPr/>
+        </p:nvPicPr>
+        <p:blipFill>
+          <a:blip r:embed="rId6"/>
+          <a:stretch>
+            <a:fillRect/>
+          </a:stretch>
+        </p:blipFill>
+        <p:spPr>
+          <a:xfrm>
+            <a:off x="6601968" y="2377440"/>
+            <a:ext cx="146304" cy="146304"/>
+          </a:xfrm>
+          <a:prstGeom prst="rect">
+            <a:avLst/>
+          </a:prstGeom>
+        </p:spPr>
+      </p:pic>
+      <p:sp>
+        <p:nvSpPr>
+          <p:cNvPr id="22" name="장치 단계 4"/>
           <p:cNvSpPr/>
           <p:nvPr/>
         </p:nvSpPr>
         <p:spPr>
           <a:xfrm>
-            <a:off x="4663440" y="2194560"/>
-            <a:ext cx="1920240" cy="2103120"/>
+            <a:off x="6766560" y="1508760"/>
+            <a:ext cx="1920240" cy="1965960"/>
           </a:xfrm>
           <a:prstGeom prst="roundRect">
             <a:avLst>
@@ -4296,15 +4532,59 @@
       </p:sp>
       <p:sp>
         <p:nvSpPr>
-          <p:cNvPr id="16" name="Text 13"/>
-          <p:cNvSpPr txBox="1"/>
-          <p:nvPr/>
-        </p:nvSpPr>
-        <p:spPr>
-          <a:xfrm>
-            <a:off x="4846320" y="2331720"/>
+          <p:cNvPr id="23" name="데이터 제공 circle"/>
+          <p:cNvSpPr/>
+          <p:nvPr/>
+        </p:nvSpPr>
+        <p:spPr>
+          <a:xfrm>
+            <a:off x="6949440" y="1645920"/>
             <a:ext cx="548640" cy="548640"/>
           </a:xfrm>
+          <a:prstGeom prst="ellipse">
+            <a:avLst/>
+          </a:prstGeom>
+          <a:solidFill>
+            <a:schemeClr val="accent2"/>
+          </a:solidFill>
+          <a:ln/>
+        </p:spPr>
+      </p:sp>
+      <p:pic>
+        <p:nvPicPr>
+          <p:cNvPr id="24" name="데이터 제공 icon" descr="데이터 제공">    </p:cNvPr>
+          <p:cNvPicPr>
+            <a:picLocks noChangeAspect="1"/>
+          </p:cNvPicPr>
+          <p:nvPr/>
+        </p:nvPicPr>
+        <p:blipFill>
+          <a:blip r:embed="rId7"/>
+          <a:stretch>
+            <a:fillRect/>
+          </a:stretch>
+        </p:blipFill>
+        <p:spPr>
+          <a:xfrm>
+            <a:off x="7086600" y="1783080"/>
+            <a:ext cx="274320" cy="274320"/>
+          </a:xfrm>
+          <a:prstGeom prst="rect">
+            <a:avLst/>
+          </a:prstGeom>
+        </p:spPr>
+      </p:pic>
+      <p:sp>
+        <p:nvSpPr>
+          <p:cNvPr id="25" name="Text 16"/>
+          <p:cNvSpPr txBox="1"/>
+          <p:nvPr/>
+        </p:nvSpPr>
+        <p:spPr>
+          <a:xfrm>
+            <a:off x="6949440" y="2286000"/>
+            <a:ext cx="1600200" cy="365760"/>
+          </a:xfrm>
           <a:prstGeom prst="rect">
             <a:avLst/>
           </a:prstGeom>
@@ -4319,27 +4599,27 @@
               <a:buNone/>
             </a:pPr>
             <a:r>
-              <a:rPr lang="en-US" sz="2800" b="1" dirty="0">
-                <a:solidFill>
-                  <a:schemeClr val="accent1"/>
-                </a:solidFill>
-              </a:rPr>
-              <a:t>3</a:t>
-            </a:r>
-            <a:endParaRPr lang="en-US" sz="2800" dirty="0"/>
-          </a:p>
-        </p:txBody>
-      </p:sp>
-      <p:sp>
-        <p:nvSpPr>
-          <p:cNvPr id="17" name="Text 14"/>
-          <p:cNvSpPr txBox="1"/>
-          <p:nvPr/>
-        </p:nvSpPr>
-        <p:spPr>
-          <a:xfrm>
-            <a:off x="4846320" y="2926080"/>
-            <a:ext cx="1600200" cy="411480"/>
+              <a:rPr lang="en-US" sz="1400" b="1" dirty="0">
+                <a:solidFill>
+                  <a:schemeClr val="tx2"/>
+                </a:solidFill>
+              </a:rPr>
+              <a:t>데이터 제공</a:t>
+            </a:r>
+            <a:endParaRPr lang="en-US" sz="1400" dirty="0"/>
+          </a:p>
+        </p:txBody>
+      </p:sp>
+      <p:sp>
+        <p:nvSpPr>
+          <p:cNvPr id="26" name="Text 17"/>
+          <p:cNvSpPr txBox="1"/>
+          <p:nvPr/>
+        </p:nvSpPr>
+        <p:spPr>
+          <a:xfrm>
+            <a:off x="6949440" y="2651760"/>
+            <a:ext cx="1600200" cy="731520"/>
           </a:xfrm>
           <a:prstGeom prst="rect">
             <a:avLst/>
@@ -4355,27 +4635,135 @@
               <a:buNone/>
             </a:pPr>
             <a:r>
-              <a:rPr lang="en-US" sz="1500" b="1" dirty="0">
+              <a:rPr lang="en-US" sz="1100" dirty="0">
+                <a:solidFill>
+                  <a:schemeClr val="tx1"/>
+                </a:solidFill>
+              </a:rPr>
+              <a:t>성분·양·위치·시기를 일본 환경성 데이터베이스에 제공</a:t>
+            </a:r>
+            <a:endParaRPr lang="en-US" sz="1100" dirty="0"/>
+          </a:p>
+        </p:txBody>
+      </p:sp>
+      <p:sp>
+        <p:nvSpPr>
+          <p:cNvPr id="27" name="Text 18"/>
+          <p:cNvSpPr txBox="1"/>
+          <p:nvPr/>
+        </p:nvSpPr>
+        <p:spPr>
+          <a:xfrm>
+            <a:off x="457200" y="3657600"/>
+            <a:ext cx="2651760" cy="502920"/>
+          </a:xfrm>
+          <a:prstGeom prst="rect">
+            <a:avLst/>
+          </a:prstGeom>
+          <a:noFill/>
+          <a:ln/>
+        </p:spPr>
+        <p:txBody>
+          <a:bodyPr wrap="square" lIns="0" tIns="0" rIns="0" bIns="0" rtlCol="0" anchor="ctr"/>
+          <a:lstStyle/>
+          <a:p>
+            <a:pPr indent="0" marL="0">
+              <a:buNone/>
+            </a:pPr>
+            <a:r>
+              <a:rPr lang="en-US" sz="2400" b="1" dirty="0">
+                <a:solidFill>
+                  <a:schemeClr val="accent2"/>
+                </a:solidFill>
+              </a:rPr>
+              <a:t>약 70배</a:t>
+            </a:r>
+            <a:endParaRPr lang="en-US" sz="2400" dirty="0"/>
+          </a:p>
+        </p:txBody>
+      </p:sp>
+      <p:sp>
+        <p:nvSpPr>
+          <p:cNvPr id="28" name="Text 19"/>
+          <p:cNvSpPr txBox="1"/>
+          <p:nvPr/>
+        </p:nvSpPr>
+        <p:spPr>
+          <a:xfrm>
+            <a:off x="457200" y="4160520"/>
+            <a:ext cx="2651760" cy="365760"/>
+          </a:xfrm>
+          <a:prstGeom prst="rect">
+            <a:avLst/>
+          </a:prstGeom>
+          <a:noFill/>
+          <a:ln/>
+        </p:spPr>
+        <p:txBody>
+          <a:bodyPr wrap="square" lIns="0" tIns="0" rIns="0" bIns="0" rtlCol="0" anchor="t"/>
+          <a:lstStyle/>
+          <a:p>
+            <a:pPr indent="0" marL="0">
+              <a:buNone/>
+            </a:pPr>
+            <a:r>
+              <a:rPr lang="en-US" sz="1100" dirty="0">
+                <a:solidFill>
+                  <a:schemeClr val="accent6"/>
+                </a:solidFill>
+              </a:rPr>
+              <a:t>처음 장치보다 1년에 처리하는 바닷물</a:t>
+            </a:r>
+            <a:endParaRPr lang="en-US" sz="1100" dirty="0"/>
+          </a:p>
+        </p:txBody>
+      </p:sp>
+      <p:sp>
+        <p:nvSpPr>
+          <p:cNvPr id="29" name="Text 20"/>
+          <p:cNvSpPr txBox="1"/>
+          <p:nvPr/>
+        </p:nvSpPr>
+        <p:spPr>
+          <a:xfrm>
+            <a:off x="3246120" y="3657600"/>
+            <a:ext cx="2651760" cy="502920"/>
+          </a:xfrm>
+          <a:prstGeom prst="rect">
+            <a:avLst/>
+          </a:prstGeom>
+          <a:noFill/>
+          <a:ln/>
+        </p:spPr>
+        <p:txBody>
+          <a:bodyPr wrap="square" lIns="0" tIns="0" rIns="0" bIns="0" rtlCol="0" anchor="ctr"/>
+          <a:lstStyle/>
+          <a:p>
+            <a:pPr indent="0" marL="0">
+              <a:buNone/>
+            </a:pPr>
+            <a:r>
+              <a:rPr lang="en-US" sz="2400" b="1" dirty="0">
                 <a:solidFill>
                   <a:schemeClr val="tx2"/>
                 </a:solidFill>
               </a:rPr>
-              <a:t>바다별 비교</a:t>
-            </a:r>
-            <a:endParaRPr lang="en-US" sz="1500" dirty="0"/>
-          </a:p>
-        </p:txBody>
-      </p:sp>
-      <p:sp>
-        <p:nvSpPr>
-          <p:cNvPr id="18" name="Text 15"/>
-          <p:cNvSpPr txBox="1"/>
-          <p:nvPr/>
-        </p:nvSpPr>
-        <p:spPr>
-          <a:xfrm>
-            <a:off x="4846320" y="3383280"/>
-            <a:ext cx="1600200" cy="777240"/>
+              <a:t>2022년 6월~</a:t>
+            </a:r>
+            <a:endParaRPr lang="en-US" sz="2400" dirty="0"/>
+          </a:p>
+        </p:txBody>
+      </p:sp>
+      <p:sp>
+        <p:nvSpPr>
+          <p:cNvPr id="30" name="Text 21"/>
+          <p:cNvSpPr txBox="1"/>
+          <p:nvPr/>
+        </p:nvSpPr>
+        <p:spPr>
+          <a:xfrm>
+            <a:off x="3246120" y="4160520"/>
+            <a:ext cx="2651760" cy="365760"/>
           </a:xfrm>
           <a:prstGeom prst="rect">
             <a:avLst/>
@@ -4391,31 +4779,31 @@
               <a:buNone/>
             </a:pPr>
             <a:r>
-              <a:rPr lang="en-US" sz="1200" dirty="0">
-                <a:solidFill>
-                  <a:schemeClr val="tx1"/>
-                </a:solidFill>
-              </a:rPr>
-              <a:t>우리나라 주변 바다와 다른 바다</a:t>
-            </a:r>
-            <a:endParaRPr lang="en-US" sz="1200" dirty="0"/>
-          </a:p>
-        </p:txBody>
-      </p:sp>
-      <p:sp>
-        <p:nvSpPr>
-          <p:cNvPr id="19" name="단계 카드 4"/>
+              <a:rPr lang="en-US" sz="1100" dirty="0">
+                <a:solidFill>
+                  <a:schemeClr val="accent6"/>
+                </a:solidFill>
+              </a:rPr>
+              <a:t>자동차 운반선에서 항해하며 상시 회수</a:t>
+            </a:r>
+            <a:endParaRPr lang="en-US" sz="1100" dirty="0"/>
+          </a:p>
+        </p:txBody>
+      </p:sp>
+      <p:sp>
+        <p:nvSpPr>
+          <p:cNvPr id="31" name="한계 카드"/>
           <p:cNvSpPr/>
           <p:nvPr/>
         </p:nvSpPr>
         <p:spPr>
           <a:xfrm>
-            <a:off x="6766560" y="2194560"/>
-            <a:ext cx="1920240" cy="2103120"/>
+            <a:off x="6035040" y="3657600"/>
+            <a:ext cx="2651760" cy="914400"/>
           </a:xfrm>
           <a:prstGeom prst="roundRect">
             <a:avLst>
-              <a:gd name="adj" fmla="val 5714"/>
+              <a:gd name="adj" fmla="val 12000"/>
             </a:avLst>
           </a:prstGeom>
           <a:solidFill>
@@ -4426,107 +4814,46 @@
       </p:sp>
       <p:sp>
         <p:nvSpPr>
-          <p:cNvPr id="20" name="Text 17"/>
-          <p:cNvSpPr txBox="1"/>
-          <p:nvPr/>
-        </p:nvSpPr>
-        <p:spPr>
-          <a:xfrm>
-            <a:off x="6949440" y="2331720"/>
-            <a:ext cx="548640" cy="548640"/>
-          </a:xfrm>
-          <a:prstGeom prst="rect">
-            <a:avLst/>
-          </a:prstGeom>
-          <a:noFill/>
-          <a:ln/>
-        </p:spPr>
-        <p:txBody>
-          <a:bodyPr wrap="square" lIns="0" tIns="0" rIns="0" bIns="0" rtlCol="0" anchor="t"/>
-          <a:lstStyle/>
-          <a:p>
-            <a:pPr indent="0" marL="0">
-              <a:buNone/>
-            </a:pPr>
-            <a:r>
-              <a:rPr lang="en-US" sz="2800" b="1" dirty="0">
+          <p:cNvPr id="32" name="Text 23"/>
+          <p:cNvSpPr txBox="1"/>
+          <p:nvPr/>
+        </p:nvSpPr>
+        <p:spPr>
+          <a:xfrm>
+            <a:off x="6217920" y="3749040"/>
+            <a:ext cx="2286000" cy="731520"/>
+          </a:xfrm>
+          <a:prstGeom prst="rect">
+            <a:avLst/>
+          </a:prstGeom>
+          <a:noFill/>
+          <a:ln/>
+        </p:spPr>
+        <p:txBody>
+          <a:bodyPr wrap="square" lIns="0" tIns="0" rIns="0" bIns="0" rtlCol="0" anchor="ctr"/>
+          <a:lstStyle/>
+          <a:p>
+            <a:pPr indent="0" marL="0">
+              <a:buNone/>
+            </a:pPr>
+            <a:r>
+              <a:rPr lang="en-US" sz="1200" b="1" dirty="0">
                 <a:solidFill>
                   <a:schemeClr val="accent3"/>
                 </a:solidFill>
               </a:rPr>
-              <a:t>4</a:t>
-            </a:r>
-            <a:endParaRPr lang="en-US" sz="2800" dirty="0"/>
-          </a:p>
-        </p:txBody>
-      </p:sp>
-      <p:sp>
-        <p:nvSpPr>
-          <p:cNvPr id="21" name="Text 18"/>
-          <p:cNvSpPr txBox="1"/>
-          <p:nvPr/>
-        </p:nvSpPr>
-        <p:spPr>
-          <a:xfrm>
-            <a:off x="6949440" y="2926080"/>
-            <a:ext cx="1600200" cy="411480"/>
-          </a:xfrm>
-          <a:prstGeom prst="rect">
-            <a:avLst/>
-          </a:prstGeom>
-          <a:noFill/>
-          <a:ln/>
-        </p:spPr>
-        <p:txBody>
-          <a:bodyPr wrap="square" lIns="0" tIns="0" rIns="0" bIns="0" rtlCol="0" anchor="t"/>
-          <a:lstStyle/>
-          <a:p>
-            <a:pPr indent="0" marL="0">
-              <a:buNone/>
-            </a:pPr>
-            <a:r>
-              <a:rPr lang="en-US" sz="1500" b="1" dirty="0">
+              <a:t>한계  </a:t>
+            </a:r>
+            <a:pPr indent="0" marL="0">
+              <a:buNone/>
+            </a:pPr>
+            <a:r>
+              <a:rPr lang="en-US" sz="1200" dirty="0">
                 <a:solidFill>
                   <a:schemeClr val="bg1"/>
                 </a:solidFill>
               </a:rPr>
-              <a:t>연도별 추세</a:t>
-            </a:r>
-            <a:endParaRPr lang="en-US" sz="1500" dirty="0"/>
-          </a:p>
-        </p:txBody>
-      </p:sp>
-      <p:sp>
-        <p:nvSpPr>
-          <p:cNvPr id="22" name="Text 19"/>
-          <p:cNvSpPr txBox="1"/>
-          <p:nvPr/>
-        </p:nvSpPr>
-        <p:spPr>
-          <a:xfrm>
-            <a:off x="6949440" y="3383280"/>
-            <a:ext cx="1600200" cy="777240"/>
-          </a:xfrm>
-          <a:prstGeom prst="rect">
-            <a:avLst/>
-          </a:prstGeom>
-          <a:noFill/>
-          <a:ln/>
-        </p:spPr>
-        <p:txBody>
-          <a:bodyPr wrap="square" lIns="0" tIns="0" rIns="0" bIns="0" rtlCol="0" anchor="t"/>
-          <a:lstStyle/>
-          <a:p>
-            <a:pPr indent="0" marL="0">
-              <a:buNone/>
-            </a:pPr>
-            <a:r>
-              <a:rPr lang="en-US" sz="1200" dirty="0">
-                <a:solidFill>
-                  <a:schemeClr val="accent5"/>
-                </a:solidFill>
-              </a:rPr>
-              <a:t>'계속 늘어난다'는 논문 주장 검증</a:t>
+              <a:t>배 한 척이 모으는 양은 아직 적음</a:t>
             </a:r>
             <a:endParaRPr lang="en-US" sz="1200" dirty="0"/>
           </a:p>
@@ -4588,6 +4915,750 @@
 <file path=ppt/slides/slide12.xml><?xml version="1.0" encoding="utf-8"?>
 <p:sld xmlns:a="http://schemas.openxmlformats.org/drawingml/2006/main" xmlns:r="http://schemas.openxmlformats.org/officeDocument/2006/relationships" xmlns:p="http://schemas.openxmlformats.org/presentationml/2006/main">
   <p:cSld name="Slide 12">
+    <p:spTree>
+      <p:nvGrpSpPr>
+        <p:cNvPr id="1" name=""/>
+        <p:cNvGrpSpPr/>
+        <p:nvPr/>
+      </p:nvGrpSpPr>
+      <p:grpSpPr>
+        <a:xfrm>
+          <a:off x="0" y="0"/>
+          <a:ext cx="0" cy="0"/>
+          <a:chOff x="0" y="0"/>
+          <a:chExt cx="0" cy="0"/>
+        </a:xfrm>
+      </p:grpSpPr>
+      <p:sp>
+        <p:nvSpPr>
+          <p:cNvPr id="2" name="Text 0"/>
+          <p:cNvSpPr/>
+          <p:nvPr>
+            <p:ph idx="100" type="title" hasCustomPrompt="1"/>
+          </p:nvPr>
+        </p:nvSpPr>
+        <p:spPr>
+          <a:xfrm>
+            <a:off x="457200" y="274320"/>
+            <a:ext cx="8229600" cy="640080"/>
+          </a:xfrm>
+          <a:prstGeom prst="rect">
+            <a:avLst/>
+          </a:prstGeom>
+          <a:noFill/>
+          <a:ln/>
+        </p:spPr>
+        <p:txBody>
+          <a:bodyPr wrap="square" lIns="0" tIns="0" rIns="0" bIns="0" rtlCol="0" anchor="ctr"/>
+          <a:lstStyle/>
+          <a:p>
+            <a:pPr indent="0" marL="0">
+              <a:buNone/>
+            </a:pPr>
+            <a:r>
+              <a:rPr lang="en-US" sz="2600" b="1" dirty="0">
+                <a:solidFill>
+                  <a:schemeClr val="tx2"/>
+                </a:solidFill>
+              </a:rPr>
+              <a:t>후속 탐구: 공개 데이터로 직접 확인하기</a:t>
+            </a:r>
+            <a:endParaRPr lang="en-US" sz="2600" dirty="0"/>
+          </a:p>
+        </p:txBody>
+      </p:sp>
+      <p:sp>
+        <p:nvSpPr>
+          <p:cNvPr id="3" name="데이터 circle"/>
+          <p:cNvSpPr/>
+          <p:nvPr/>
+        </p:nvSpPr>
+        <p:spPr>
+          <a:xfrm>
+            <a:off x="457200" y="1188720"/>
+            <a:ext cx="640080" cy="640080"/>
+          </a:xfrm>
+          <a:prstGeom prst="ellipse">
+            <a:avLst/>
+          </a:prstGeom>
+          <a:solidFill>
+            <a:schemeClr val="accent1"/>
+          </a:solidFill>
+          <a:ln/>
+        </p:spPr>
+      </p:sp>
+      <p:pic>
+        <p:nvPicPr>
+          <p:cNvPr id="4" name="데이터 icon" descr="데이터">    </p:cNvPr>
+          <p:cNvPicPr>
+            <a:picLocks noChangeAspect="1"/>
+          </p:cNvPicPr>
+          <p:nvPr/>
+        </p:nvPicPr>
+        <p:blipFill>
+          <a:blip r:embed="rId1"/>
+          <a:stretch>
+            <a:fillRect/>
+          </a:stretch>
+        </p:blipFill>
+        <p:spPr>
+          <a:xfrm>
+            <a:off x="617220" y="1348740"/>
+            <a:ext cx="320040" cy="320040"/>
+          </a:xfrm>
+          <a:prstGeom prst="rect">
+            <a:avLst/>
+          </a:prstGeom>
+        </p:spPr>
+      </p:pic>
+      <p:sp>
+        <p:nvSpPr>
+          <p:cNvPr id="5" name="Text 2"/>
+          <p:cNvSpPr txBox="1"/>
+          <p:nvPr/>
+        </p:nvSpPr>
+        <p:spPr>
+          <a:xfrm>
+            <a:off x="1234440" y="1188720"/>
+            <a:ext cx="7406640" cy="365760"/>
+          </a:xfrm>
+          <a:prstGeom prst="rect">
+            <a:avLst/>
+          </a:prstGeom>
+          <a:noFill/>
+          <a:ln/>
+        </p:spPr>
+        <p:txBody>
+          <a:bodyPr wrap="square" lIns="0" tIns="0" rIns="0" bIns="0" rtlCol="0" anchor="ctr"/>
+          <a:lstStyle/>
+          <a:p>
+            <a:pPr indent="0" marL="0">
+              <a:buNone/>
+            </a:pPr>
+            <a:r>
+              <a:rPr lang="en-US" sz="1500" b="1" dirty="0">
+                <a:solidFill>
+                  <a:schemeClr val="tx2"/>
+                </a:solidFill>
+              </a:rPr>
+              <a:t>NOAA 전 세계 해양 미세플라스틱 데이터베이스 (1972년~현재)</a:t>
+            </a:r>
+            <a:endParaRPr lang="en-US" sz="1500" dirty="0"/>
+          </a:p>
+        </p:txBody>
+      </p:sp>
+      <p:sp>
+        <p:nvSpPr>
+          <p:cNvPr id="6" name="Text 3"/>
+          <p:cNvSpPr txBox="1"/>
+          <p:nvPr/>
+        </p:nvSpPr>
+        <p:spPr>
+          <a:xfrm>
+            <a:off x="1234440" y="1554480"/>
+            <a:ext cx="7406640" cy="320040"/>
+          </a:xfrm>
+          <a:prstGeom prst="rect">
+            <a:avLst/>
+          </a:prstGeom>
+          <a:noFill/>
+          <a:ln/>
+        </p:spPr>
+        <p:txBody>
+          <a:bodyPr wrap="square" lIns="0" tIns="0" rIns="0" bIns="0" rtlCol="0" anchor="ctr"/>
+          <a:lstStyle/>
+          <a:p>
+            <a:pPr indent="0" marL="0">
+              <a:buNone/>
+            </a:pPr>
+            <a:r>
+              <a:rPr lang="en-US" sz="1300" dirty="0">
+                <a:solidFill>
+                  <a:schemeClr val="accent6"/>
+                </a:solidFill>
+              </a:rPr>
+              <a:t>+ 공공데이터포털 해양환경공단 '해양쓰레기 모니터링' 자료</a:t>
+            </a:r>
+            <a:endParaRPr lang="en-US" sz="1300" dirty="0"/>
+          </a:p>
+        </p:txBody>
+      </p:sp>
+      <p:sp>
+        <p:nvSpPr>
+          <p:cNvPr id="7" name="단계 카드 1"/>
+          <p:cNvSpPr/>
+          <p:nvPr/>
+        </p:nvSpPr>
+        <p:spPr>
+          <a:xfrm>
+            <a:off x="457200" y="2194560"/>
+            <a:ext cx="1920240" cy="2103120"/>
+          </a:xfrm>
+          <a:prstGeom prst="roundRect">
+            <a:avLst>
+              <a:gd name="adj" fmla="val 5714"/>
+            </a:avLst>
+          </a:prstGeom>
+          <a:solidFill>
+            <a:schemeClr val="bg2"/>
+          </a:solidFill>
+          <a:ln/>
+        </p:spPr>
+      </p:sp>
+      <p:sp>
+        <p:nvSpPr>
+          <p:cNvPr id="8" name="Text 5"/>
+          <p:cNvSpPr txBox="1"/>
+          <p:nvPr/>
+        </p:nvSpPr>
+        <p:spPr>
+          <a:xfrm>
+            <a:off x="640080" y="2331720"/>
+            <a:ext cx="548640" cy="548640"/>
+          </a:xfrm>
+          <a:prstGeom prst="rect">
+            <a:avLst/>
+          </a:prstGeom>
+          <a:noFill/>
+          <a:ln/>
+        </p:spPr>
+        <p:txBody>
+          <a:bodyPr wrap="square" lIns="0" tIns="0" rIns="0" bIns="0" rtlCol="0" anchor="t"/>
+          <a:lstStyle/>
+          <a:p>
+            <a:pPr indent="0" marL="0">
+              <a:buNone/>
+            </a:pPr>
+            <a:r>
+              <a:rPr lang="en-US" sz="2800" b="1" dirty="0">
+                <a:solidFill>
+                  <a:schemeClr val="accent1"/>
+                </a:solidFill>
+              </a:rPr>
+              <a:t>1</a:t>
+            </a:r>
+            <a:endParaRPr lang="en-US" sz="2800" dirty="0"/>
+          </a:p>
+        </p:txBody>
+      </p:sp>
+      <p:sp>
+        <p:nvSpPr>
+          <p:cNvPr id="9" name="Text 6"/>
+          <p:cNvSpPr txBox="1"/>
+          <p:nvPr/>
+        </p:nvSpPr>
+        <p:spPr>
+          <a:xfrm>
+            <a:off x="640080" y="2926080"/>
+            <a:ext cx="1600200" cy="411480"/>
+          </a:xfrm>
+          <a:prstGeom prst="rect">
+            <a:avLst/>
+          </a:prstGeom>
+          <a:noFill/>
+          <a:ln/>
+        </p:spPr>
+        <p:txBody>
+          <a:bodyPr wrap="square" lIns="0" tIns="0" rIns="0" bIns="0" rtlCol="0" anchor="t"/>
+          <a:lstStyle/>
+          <a:p>
+            <a:pPr indent="0" marL="0">
+              <a:buNone/>
+            </a:pPr>
+            <a:r>
+              <a:rPr lang="en-US" sz="1500" b="1" dirty="0">
+                <a:solidFill>
+                  <a:schemeClr val="tx2"/>
+                </a:solidFill>
+              </a:rPr>
+              <a:t>내려받기</a:t>
+            </a:r>
+            <a:endParaRPr lang="en-US" sz="1500" dirty="0"/>
+          </a:p>
+        </p:txBody>
+      </p:sp>
+      <p:sp>
+        <p:nvSpPr>
+          <p:cNvPr id="10" name="Text 7"/>
+          <p:cNvSpPr txBox="1"/>
+          <p:nvPr/>
+        </p:nvSpPr>
+        <p:spPr>
+          <a:xfrm>
+            <a:off x="640080" y="3383280"/>
+            <a:ext cx="1600200" cy="777240"/>
+          </a:xfrm>
+          <a:prstGeom prst="rect">
+            <a:avLst/>
+          </a:prstGeom>
+          <a:noFill/>
+          <a:ln/>
+        </p:spPr>
+        <p:txBody>
+          <a:bodyPr wrap="square" lIns="0" tIns="0" rIns="0" bIns="0" rtlCol="0" anchor="t"/>
+          <a:lstStyle/>
+          <a:p>
+            <a:pPr indent="0" marL="0">
+              <a:buNone/>
+            </a:pPr>
+            <a:r>
+              <a:rPr lang="en-US" sz="1200" dirty="0">
+                <a:solidFill>
+                  <a:schemeClr val="tx1"/>
+                </a:solidFill>
+              </a:rPr>
+              <a:t>전 세계 바닷물·해변·퇴적물 농도 자료</a:t>
+            </a:r>
+            <a:endParaRPr lang="en-US" sz="1200" dirty="0"/>
+          </a:p>
+        </p:txBody>
+      </p:sp>
+      <p:sp>
+        <p:nvSpPr>
+          <p:cNvPr id="11" name="단계 카드 2"/>
+          <p:cNvSpPr/>
+          <p:nvPr/>
+        </p:nvSpPr>
+        <p:spPr>
+          <a:xfrm>
+            <a:off x="2560320" y="2194560"/>
+            <a:ext cx="1920240" cy="2103120"/>
+          </a:xfrm>
+          <a:prstGeom prst="roundRect">
+            <a:avLst>
+              <a:gd name="adj" fmla="val 5714"/>
+            </a:avLst>
+          </a:prstGeom>
+          <a:solidFill>
+            <a:schemeClr val="bg2"/>
+          </a:solidFill>
+          <a:ln/>
+        </p:spPr>
+      </p:sp>
+      <p:sp>
+        <p:nvSpPr>
+          <p:cNvPr id="12" name="Text 9"/>
+          <p:cNvSpPr txBox="1"/>
+          <p:nvPr/>
+        </p:nvSpPr>
+        <p:spPr>
+          <a:xfrm>
+            <a:off x="2743200" y="2331720"/>
+            <a:ext cx="548640" cy="548640"/>
+          </a:xfrm>
+          <a:prstGeom prst="rect">
+            <a:avLst/>
+          </a:prstGeom>
+          <a:noFill/>
+          <a:ln/>
+        </p:spPr>
+        <p:txBody>
+          <a:bodyPr wrap="square" lIns="0" tIns="0" rIns="0" bIns="0" rtlCol="0" anchor="t"/>
+          <a:lstStyle/>
+          <a:p>
+            <a:pPr indent="0" marL="0">
+              <a:buNone/>
+            </a:pPr>
+            <a:r>
+              <a:rPr lang="en-US" sz="2800" b="1" dirty="0">
+                <a:solidFill>
+                  <a:schemeClr val="accent1"/>
+                </a:solidFill>
+              </a:rPr>
+              <a:t>2</a:t>
+            </a:r>
+            <a:endParaRPr lang="en-US" sz="2800" dirty="0"/>
+          </a:p>
+        </p:txBody>
+      </p:sp>
+      <p:sp>
+        <p:nvSpPr>
+          <p:cNvPr id="13" name="Text 10"/>
+          <p:cNvSpPr txBox="1"/>
+          <p:nvPr/>
+        </p:nvSpPr>
+        <p:spPr>
+          <a:xfrm>
+            <a:off x="2743200" y="2926080"/>
+            <a:ext cx="1600200" cy="411480"/>
+          </a:xfrm>
+          <a:prstGeom prst="rect">
+            <a:avLst/>
+          </a:prstGeom>
+          <a:noFill/>
+          <a:ln/>
+        </p:spPr>
+        <p:txBody>
+          <a:bodyPr wrap="square" lIns="0" tIns="0" rIns="0" bIns="0" rtlCol="0" anchor="t"/>
+          <a:lstStyle/>
+          <a:p>
+            <a:pPr indent="0" marL="0">
+              <a:buNone/>
+            </a:pPr>
+            <a:r>
+              <a:rPr lang="en-US" sz="1500" b="1" dirty="0">
+                <a:solidFill>
+                  <a:schemeClr val="tx2"/>
+                </a:solidFill>
+              </a:rPr>
+              <a:t>방법별 정리</a:t>
+            </a:r>
+            <a:endParaRPr lang="en-US" sz="1500" dirty="0"/>
+          </a:p>
+        </p:txBody>
+      </p:sp>
+      <p:sp>
+        <p:nvSpPr>
+          <p:cNvPr id="14" name="Text 11"/>
+          <p:cNvSpPr txBox="1"/>
+          <p:nvPr/>
+        </p:nvSpPr>
+        <p:spPr>
+          <a:xfrm>
+            <a:off x="2743200" y="3383280"/>
+            <a:ext cx="1600200" cy="777240"/>
+          </a:xfrm>
+          <a:prstGeom prst="rect">
+            <a:avLst/>
+          </a:prstGeom>
+          <a:noFill/>
+          <a:ln/>
+        </p:spPr>
+        <p:txBody>
+          <a:bodyPr wrap="square" lIns="0" tIns="0" rIns="0" bIns="0" rtlCol="0" anchor="t"/>
+          <a:lstStyle/>
+          <a:p>
+            <a:pPr indent="0" marL="0">
+              <a:buNone/>
+            </a:pPr>
+            <a:r>
+              <a:rPr lang="en-US" sz="1200" dirty="0">
+                <a:solidFill>
+                  <a:schemeClr val="tx1"/>
+                </a:solidFill>
+              </a:rPr>
+              <a:t>조사 방법이 같은 자료끼리 묶어 비교</a:t>
+            </a:r>
+            <a:endParaRPr lang="en-US" sz="1200" dirty="0"/>
+          </a:p>
+        </p:txBody>
+      </p:sp>
+      <p:sp>
+        <p:nvSpPr>
+          <p:cNvPr id="15" name="단계 카드 3"/>
+          <p:cNvSpPr/>
+          <p:nvPr/>
+        </p:nvSpPr>
+        <p:spPr>
+          <a:xfrm>
+            <a:off x="4663440" y="2194560"/>
+            <a:ext cx="1920240" cy="2103120"/>
+          </a:xfrm>
+          <a:prstGeom prst="roundRect">
+            <a:avLst>
+              <a:gd name="adj" fmla="val 5714"/>
+            </a:avLst>
+          </a:prstGeom>
+          <a:solidFill>
+            <a:schemeClr val="bg2"/>
+          </a:solidFill>
+          <a:ln/>
+        </p:spPr>
+      </p:sp>
+      <p:sp>
+        <p:nvSpPr>
+          <p:cNvPr id="16" name="Text 13"/>
+          <p:cNvSpPr txBox="1"/>
+          <p:nvPr/>
+        </p:nvSpPr>
+        <p:spPr>
+          <a:xfrm>
+            <a:off x="4846320" y="2331720"/>
+            <a:ext cx="548640" cy="548640"/>
+          </a:xfrm>
+          <a:prstGeom prst="rect">
+            <a:avLst/>
+          </a:prstGeom>
+          <a:noFill/>
+          <a:ln/>
+        </p:spPr>
+        <p:txBody>
+          <a:bodyPr wrap="square" lIns="0" tIns="0" rIns="0" bIns="0" rtlCol="0" anchor="t"/>
+          <a:lstStyle/>
+          <a:p>
+            <a:pPr indent="0" marL="0">
+              <a:buNone/>
+            </a:pPr>
+            <a:r>
+              <a:rPr lang="en-US" sz="2800" b="1" dirty="0">
+                <a:solidFill>
+                  <a:schemeClr val="accent1"/>
+                </a:solidFill>
+              </a:rPr>
+              <a:t>3</a:t>
+            </a:r>
+            <a:endParaRPr lang="en-US" sz="2800" dirty="0"/>
+          </a:p>
+        </p:txBody>
+      </p:sp>
+      <p:sp>
+        <p:nvSpPr>
+          <p:cNvPr id="17" name="Text 14"/>
+          <p:cNvSpPr txBox="1"/>
+          <p:nvPr/>
+        </p:nvSpPr>
+        <p:spPr>
+          <a:xfrm>
+            <a:off x="4846320" y="2926080"/>
+            <a:ext cx="1600200" cy="411480"/>
+          </a:xfrm>
+          <a:prstGeom prst="rect">
+            <a:avLst/>
+          </a:prstGeom>
+          <a:noFill/>
+          <a:ln/>
+        </p:spPr>
+        <p:txBody>
+          <a:bodyPr wrap="square" lIns="0" tIns="0" rIns="0" bIns="0" rtlCol="0" anchor="t"/>
+          <a:lstStyle/>
+          <a:p>
+            <a:pPr indent="0" marL="0">
+              <a:buNone/>
+            </a:pPr>
+            <a:r>
+              <a:rPr lang="en-US" sz="1500" b="1" dirty="0">
+                <a:solidFill>
+                  <a:schemeClr val="tx2"/>
+                </a:solidFill>
+              </a:rPr>
+              <a:t>바다별 비교</a:t>
+            </a:r>
+            <a:endParaRPr lang="en-US" sz="1500" dirty="0"/>
+          </a:p>
+        </p:txBody>
+      </p:sp>
+      <p:sp>
+        <p:nvSpPr>
+          <p:cNvPr id="18" name="Text 15"/>
+          <p:cNvSpPr txBox="1"/>
+          <p:nvPr/>
+        </p:nvSpPr>
+        <p:spPr>
+          <a:xfrm>
+            <a:off x="4846320" y="3383280"/>
+            <a:ext cx="1600200" cy="777240"/>
+          </a:xfrm>
+          <a:prstGeom prst="rect">
+            <a:avLst/>
+          </a:prstGeom>
+          <a:noFill/>
+          <a:ln/>
+        </p:spPr>
+        <p:txBody>
+          <a:bodyPr wrap="square" lIns="0" tIns="0" rIns="0" bIns="0" rtlCol="0" anchor="t"/>
+          <a:lstStyle/>
+          <a:p>
+            <a:pPr indent="0" marL="0">
+              <a:buNone/>
+            </a:pPr>
+            <a:r>
+              <a:rPr lang="en-US" sz="1200" dirty="0">
+                <a:solidFill>
+                  <a:schemeClr val="tx1"/>
+                </a:solidFill>
+              </a:rPr>
+              <a:t>우리나라 주변 바다와 다른 바다</a:t>
+            </a:r>
+            <a:endParaRPr lang="en-US" sz="1200" dirty="0"/>
+          </a:p>
+        </p:txBody>
+      </p:sp>
+      <p:sp>
+        <p:nvSpPr>
+          <p:cNvPr id="19" name="단계 카드 4"/>
+          <p:cNvSpPr/>
+          <p:nvPr/>
+        </p:nvSpPr>
+        <p:spPr>
+          <a:xfrm>
+            <a:off x="6766560" y="2194560"/>
+            <a:ext cx="1920240" cy="2103120"/>
+          </a:xfrm>
+          <a:prstGeom prst="roundRect">
+            <a:avLst>
+              <a:gd name="adj" fmla="val 5714"/>
+            </a:avLst>
+          </a:prstGeom>
+          <a:solidFill>
+            <a:schemeClr val="tx2"/>
+          </a:solidFill>
+          <a:ln/>
+        </p:spPr>
+      </p:sp>
+      <p:sp>
+        <p:nvSpPr>
+          <p:cNvPr id="20" name="Text 17"/>
+          <p:cNvSpPr txBox="1"/>
+          <p:nvPr/>
+        </p:nvSpPr>
+        <p:spPr>
+          <a:xfrm>
+            <a:off x="6949440" y="2331720"/>
+            <a:ext cx="548640" cy="548640"/>
+          </a:xfrm>
+          <a:prstGeom prst="rect">
+            <a:avLst/>
+          </a:prstGeom>
+          <a:noFill/>
+          <a:ln/>
+        </p:spPr>
+        <p:txBody>
+          <a:bodyPr wrap="square" lIns="0" tIns="0" rIns="0" bIns="0" rtlCol="0" anchor="t"/>
+          <a:lstStyle/>
+          <a:p>
+            <a:pPr indent="0" marL="0">
+              <a:buNone/>
+            </a:pPr>
+            <a:r>
+              <a:rPr lang="en-US" sz="2800" b="1" dirty="0">
+                <a:solidFill>
+                  <a:schemeClr val="accent3"/>
+                </a:solidFill>
+              </a:rPr>
+              <a:t>4</a:t>
+            </a:r>
+            <a:endParaRPr lang="en-US" sz="2800" dirty="0"/>
+          </a:p>
+        </p:txBody>
+      </p:sp>
+      <p:sp>
+        <p:nvSpPr>
+          <p:cNvPr id="21" name="Text 18"/>
+          <p:cNvSpPr txBox="1"/>
+          <p:nvPr/>
+        </p:nvSpPr>
+        <p:spPr>
+          <a:xfrm>
+            <a:off x="6949440" y="2926080"/>
+            <a:ext cx="1600200" cy="411480"/>
+          </a:xfrm>
+          <a:prstGeom prst="rect">
+            <a:avLst/>
+          </a:prstGeom>
+          <a:noFill/>
+          <a:ln/>
+        </p:spPr>
+        <p:txBody>
+          <a:bodyPr wrap="square" lIns="0" tIns="0" rIns="0" bIns="0" rtlCol="0" anchor="t"/>
+          <a:lstStyle/>
+          <a:p>
+            <a:pPr indent="0" marL="0">
+              <a:buNone/>
+            </a:pPr>
+            <a:r>
+              <a:rPr lang="en-US" sz="1500" b="1" dirty="0">
+                <a:solidFill>
+                  <a:schemeClr val="bg1"/>
+                </a:solidFill>
+              </a:rPr>
+              <a:t>연도별 추세</a:t>
+            </a:r>
+            <a:endParaRPr lang="en-US" sz="1500" dirty="0"/>
+          </a:p>
+        </p:txBody>
+      </p:sp>
+      <p:sp>
+        <p:nvSpPr>
+          <p:cNvPr id="22" name="Text 19"/>
+          <p:cNvSpPr txBox="1"/>
+          <p:nvPr/>
+        </p:nvSpPr>
+        <p:spPr>
+          <a:xfrm>
+            <a:off x="6949440" y="3383280"/>
+            <a:ext cx="1600200" cy="777240"/>
+          </a:xfrm>
+          <a:prstGeom prst="rect">
+            <a:avLst/>
+          </a:prstGeom>
+          <a:noFill/>
+          <a:ln/>
+        </p:spPr>
+        <p:txBody>
+          <a:bodyPr wrap="square" lIns="0" tIns="0" rIns="0" bIns="0" rtlCol="0" anchor="t"/>
+          <a:lstStyle/>
+          <a:p>
+            <a:pPr indent="0" marL="0">
+              <a:buNone/>
+            </a:pPr>
+            <a:r>
+              <a:rPr lang="en-US" sz="1200" dirty="0">
+                <a:solidFill>
+                  <a:schemeClr val="accent5"/>
+                </a:solidFill>
+              </a:rPr>
+              <a:t>'계속 늘어난다'는 논문 주장 검증</a:t>
+            </a:r>
+            <a:endParaRPr lang="en-US" sz="1200" dirty="0"/>
+          </a:p>
+        </p:txBody>
+      </p:sp>
+      <p:sp>
+        <p:nvSpPr>
+          <p:cNvPr id="25" name="Slide Number Placeholder 0"/>
+          <p:cNvSpPr>
+            <a:spLocks noGrp="1"/>
+          </p:cNvSpPr>
+          <p:nvPr>
+            <p:ph type="sldNum" sz="quarter" idx="4294967295"/>
+          </p:nvPr>
+        </p:nvSpPr>
+        <p:spPr>
+          <a:xfrm>
+            <a:off x="8321040" y="4754880"/>
+            <a:ext cx="457200" cy="274320"/>
+          </a:xfrm>
+          <a:prstGeom prst="rect">
+            <a:avLst/>
+          </a:prstGeom>
+          <a:extLst>
+            <a:ext uri="{C572A759-6A51-4108-AA02-DFA0A04FC94B}">
+              <ma14:wrappingTextBoxFlag xmlns:ma14="http://schemas.microsoft.com/office/mac/drawingml/2011/main" val="0"/>
+            </a:ext>
+          </a:extLst>
+        </p:spPr>
+        <p:txBody>
+          <a:bodyPr/>
+          <a:lstStyle>
+            <a:lvl1pPr>
+              <a:defRPr sz="1000">
+                <a:solidFill>
+                  <a:schemeClr val="accent6"/>
+                </a:solidFill>
+              </a:defRPr>
+            </a:lvl1pPr>
+          </a:lstStyle>
+          <a:p>
+            <a:pPr algn="r"/>
+            <a:fld id="{F7021451-1387-4CA6-816F-3879F97B5CBC}" type="slidenum">
+              <a:rPr b="0" lang="en-US"/>
+              <a:t>12</a:t>
+            </a:fld>
+            <a:endParaRPr lang="en-US"/>
+          </a:p>
+        </p:txBody>
+      </p:sp>
+    </p:spTree>
+  </p:cSld>
+  <p:clrMapOvr>
+    <a:masterClrMapping/>
+  </p:clrMapOvr>
+</p:sld>
+</file>
+
+<file path=ppt/slides/slide13.xml><?xml version="1.0" encoding="utf-8"?>
+<p:sld xmlns:a="http://schemas.openxmlformats.org/drawingml/2006/main" xmlns:r="http://schemas.openxmlformats.org/officeDocument/2006/relationships" xmlns:p="http://schemas.openxmlformats.org/presentationml/2006/main">
+  <p:cSld name="Slide 13">
     <p:spTree>
       <p:nvGrpSpPr>
         <p:cNvPr id="1" name=""/>

--- a/reports/미세플라스틱_발표_10605_박선진.pptx
+++ b/reports/미세플라스틱_발표_10605_박선진.pptx
@@ -118,14 +118,14 @@
   <p:extLst>
     <p:ext uri="{521415D9-36F7-43E2-AB2F-B90AF26B5E84}">
       <p14:sectionLst xmlns:p14="http://schemas.microsoft.com/office/powerpoint/2010/main">
-        <p14:section name="도입" id="{43e57f68-2c73-7dbc-49e9-9e90fca0c69f}">
+        <p14:section name="도입" id="{38799301-2740-2ce7-8e4f-eb64a0c0bfe4}">
           <p14:sldIdLst>
             <p14:sldId id="256"/>
             <p14:sldId id="257"/>
             <p14:sldId id="258"/>
           </p14:sldIdLst>
         </p14:section>
-        <p14:section name="생물농축" id="{63221735-6806-f2ac-78ee-5eb2256843d8}">
+        <p14:section name="생물농축" id="{9ba15bf9-f078-18f1-9ab2-3fbf315ad031}">
           <p14:sldIdLst>
             <p14:sldId id="259"/>
             <p14:sldId id="260"/>
@@ -133,13 +133,13 @@
             <p14:sldId id="262"/>
           </p14:sldIdLst>
         </p14:section>
-        <p14:section name="인체 영향" id="{48db101e-40e3-e2b5-a583-b382afcef4ab}">
+        <p14:section name="인체 영향" id="{2a26edbd-df99-61da-06e6-a0a12dadbf19}">
           <p14:sldIdLst>
             <p14:sldId id="263"/>
             <p14:sldId id="264"/>
           </p14:sldIdLst>
         </p14:section>
-        <p14:section name="결론" id="{3f5df894-387d-524e-d158-5a9e96131360}">
+        <p14:section name="결론" id="{dd7b46c8-d992-b427-3e7c-eadcabe468c6}">
           <p14:sldIdLst>
             <p14:sldId id="265"/>
             <p14:sldId id="266"/>
@@ -2801,34 +2801,6 @@
         <p:txBody>
           <a:bodyPr wrap="square" lIns="0" tIns="0" rIns="0" bIns="0" rtlCol="0" anchor="t"/>
           <a:lstStyle/>
-          <a:p>
-            <a:pPr algn="l" indent="0" marL="0">
-              <a:buNone/>
-            </a:pPr>
-            <a:r>
-              <a:rPr lang="en-US" sz="1500" dirty="0">
-                <a:solidFill>
-                  <a:schemeClr val="accent5"/>
-                </a:solidFill>
-              </a:rPr>
-              <a:t>논문: 해양 환경의 미세 플라스틱과 인간의 건강에 미치는 영향</a:t>
-            </a:r>
-            <a:endParaRPr lang="en-US" sz="1500" dirty="0"/>
-          </a:p>
-          <a:p>
-            <a:pPr algn="l" indent="0" marL="0">
-              <a:buNone/>
-            </a:pPr>
-            <a:r>
-              <a:rPr lang="en-US" sz="1500" dirty="0">
-                <a:solidFill>
-                  <a:schemeClr val="accent5"/>
-                </a:solidFill>
-              </a:rPr>
-              <a:t>2021, 박지아·강현본·최윤식 (생명과학회지 31권 4호)</a:t>
-            </a:r>
-            <a:endParaRPr lang="en-US" sz="1500" dirty="0"/>
-          </a:p>
           <a:p>
             <a:pPr algn="l" indent="0" marL="0">
               <a:buNone/>

--- a/reports/미세플라스틱_발표_10605_박선진.pptx
+++ b/reports/미세플라스틱_발표_10605_박선진.pptx
@@ -118,14 +118,14 @@
   <p:extLst>
     <p:ext uri="{521415D9-36F7-43E2-AB2F-B90AF26B5E84}">
       <p14:sectionLst xmlns:p14="http://schemas.microsoft.com/office/powerpoint/2010/main">
-        <p14:section name="도입" id="{38799301-2740-2ce7-8e4f-eb64a0c0bfe4}">
+        <p14:section name="도입" id="{2af8cc63-793b-1c3d-f19e-d8695839063b}">
           <p14:sldIdLst>
             <p14:sldId id="256"/>
             <p14:sldId id="257"/>
             <p14:sldId id="258"/>
           </p14:sldIdLst>
         </p14:section>
-        <p14:section name="생물농축" id="{9ba15bf9-f078-18f1-9ab2-3fbf315ad031}">
+        <p14:section name="생물농축" id="{c9a9f528-26be-1328-d413-c9c6ca526e33}">
           <p14:sldIdLst>
             <p14:sldId id="259"/>
             <p14:sldId id="260"/>
@@ -133,13 +133,13 @@
             <p14:sldId id="262"/>
           </p14:sldIdLst>
         </p14:section>
-        <p14:section name="인체 영향" id="{2a26edbd-df99-61da-06e6-a0a12dadbf19}">
+        <p14:section name="인체 영향" id="{25cac18e-b6c2-387b-214b-3fd0d7fb1bae}">
           <p14:sldIdLst>
             <p14:sldId id="263"/>
             <p14:sldId id="264"/>
           </p14:sldIdLst>
         </p14:section>
-        <p14:section name="결론" id="{dd7b46c8-d992-b427-3e7c-eadcabe468c6}">
+        <p14:section name="결론" id="{0efb72fc-1d68-ee45-ebbc-cbf84c18fd93}">
           <p14:sldIdLst>
             <p14:sldId id="265"/>
             <p14:sldId id="266"/>
@@ -1398,7 +1398,7 @@
           <a:p>
             <a:r>
               <a:rPr lang="en-US" dirty="0"/>
-              <a:t>정리하겠습니다. 바다에 버린 플라스틱은 잘게 부서져 먹이사슬 아래쪽 생물부터 쌓이고, 최상위 포식자까지 전달되며, 결국 해산물을 통해 우리 식탁으로 돌아옵니다. 작을수록 더 멀리 퍼지고 더 해로우며, 한번 퍼지면 다시 모을 수 없기 때문에 처음부터 바다로 들어가지 않게 막는 것이 가장 중요합니다. 들어 주셔서 감사합니다.</a:t>
+              <a:t>정리하겠습니다. 바다에 버린 플라스틱은 잘게 부서져 먹이사슬 아래쪽 생물부터 쌓이고, 실험에서는 최상위 포식자까지 전달되었으며, 결국 해산물을 통해 우리 식탁으로 돌아옵니다. 작을수록 더 멀리 퍼지고 더 해로우며, 한번 퍼지면 다시 모을 수 없기 때문에 처음부터 바다로 들어가지 않게 막는 것이 가장 중요합니다. 들어 주셔서 감사합니다.</a:t>
             </a:r>
             <a:endParaRPr lang="en-US" dirty="0"/>
           </a:p>
@@ -4307,7 +4307,7 @@
                   <a:schemeClr val="accent5"/>
                 </a:solidFill>
               </a:rPr>
-              <a:t>미세플라스틱은 먹이사슬 아래쪽 생물부터 쌓이고, 최상위 포식자까지 전달된다</a:t>
+              <a:t>미세플라스틱은 먹이사슬 아래쪽 생물부터 쌓이고, 실험에서는 최상위 포식자까지 전달되었다</a:t>
             </a:r>
             <a:endParaRPr lang="en-US" sz="1500" dirty="0"/>
           </a:p>
